--- a/docs/pptx/Ch9_P4b_Tree_Sorting.pptx
+++ b/docs/pptx/Ch9_P4b_Tree_Sorting.pptx
@@ -506,7 +506,10 @@
           <a:p>
             <a:r>
               <a:rPr lang="en-US" dirty="0"/>
-              <a:t/>
+              <a:t>TITRE: Arbres BST &amp; Algorithmes de Tri
+Critère: Critère P4b — Trees, sorting, traversal
+Objectif de cette présentation : couvrir les concepts clés pour le critère Critère P4b — Trees, sorting, traversal.
+Durée estimée : 1h30 à 2h avec exercices.</a:t>
             </a:r>
             <a:endParaRPr lang="en-US" dirty="0"/>
           </a:p>
@@ -594,7 +597,10 @@
           <a:p>
             <a:r>
               <a:rPr lang="en-US" dirty="0"/>
-              <a:t/>
+              <a:t>PROF: Dessiner un BST au tableau en insérant 50, 30, 70, 20, 40.
+Faire parcourir aux étudiants en Inorder → 20, 30, 40, 50, 70 (trié !).
+Piège : montrer ce qui arrive si on insère 10, 20, 30, 40 → arbre dégénéré.
+Exercice : insérer 8, 3, 10, 1, 6, 14 et faire les 3 parcours.</a:t>
             </a:r>
             <a:endParaRPr lang="en-US" dirty="0"/>
           </a:p>
@@ -682,7 +688,11 @@
           <a:p>
             <a:r>
               <a:rPr lang="en-US" dirty="0"/>
-              <a:t/>
+              <a:t>PROF: Utiliser le site pour la démo visuelle (Monde 1 Ch3 → Simulateur de tri).
+Pour chaque algo, poser la question : 'Combien de comparaisons pour n=1000 ?'
+- Bubble : ~500 000
+- Quick/Merge : ~10 000
+Exercice : implémenter Bubble Sort en Java et compter les comparaisons.</a:t>
             </a:r>
             <a:endParaRPr lang="en-US" dirty="0"/>
           </a:p>
@@ -770,7 +780,13 @@
           <a:p>
             <a:r>
               <a:rPr lang="en-US" dirty="0"/>
-              <a:t/>
+              <a:t>PROF: Tableau comparatif au tableau :
+|           | Temps moyen | Pire cas | Espace | Stable |
+|-----------|------------|----------|--------|--------|
+| Bubble    | O(n²)      | O(n²)    | O(1)   | Oui    |
+| Quick     | O(n log n) | O(n²)    | O(log n)| Non   |
+| Merge     | O(n log n) | O(n log n)| O(n)  | Oui    |
+| Insertion | O(n²)      | O(n²)    | O(1)   | Oui    |</a:t>
             </a:r>
             <a:endParaRPr lang="en-US" dirty="0"/>
           </a:p>
@@ -858,7 +874,8 @@
           <a:p>
             <a:r>
               <a:rPr lang="en-US" dirty="0"/>
-              <a:t/>
+              <a:t>PROF: Devoir : implémenter un BST simple avec insert() et inorderTraversal().
+Site : Monde 3 Ch9 pour les parcours interactifs.</a:t>
             </a:r>
             <a:endParaRPr lang="en-US" dirty="0"/>
           </a:p>
@@ -1213,7 +1230,7 @@
     <p:bg>
       <p:bgPr>
         <a:solidFill>
-          <a:srgbClr val="1B2A4A"/>
+          <a:srgbClr val="1A0D00"/>
         </a:solidFill>
       </p:bgPr>
     </p:bg>
@@ -1240,200 +1257,7 @@
         <p:spPr>
           <a:xfrm>
             <a:off x="0" y="0"/>
-            <a:ext cx="9144000" cy="1097280"/>
-          </a:xfrm>
-          <a:prstGeom prst="rect">
-            <a:avLst/>
-          </a:prstGeom>
-          <a:solidFill>
-            <a:srgbClr val="065A82"/>
-          </a:solidFill>
-          <a:ln/>
-        </p:spPr>
-      </p:sp>
-      <p:sp>
-        <p:nvSpPr>
-          <p:cNvPr id="3" name="Text 1"/>
-          <p:cNvSpPr/>
-          <p:nvPr/>
-        </p:nvSpPr>
-        <p:spPr>
-          <a:xfrm>
-            <a:off x="731520" y="137160"/>
-            <a:ext cx="2743200" cy="365760"/>
-          </a:xfrm>
-          <a:prstGeom prst="rect">
-            <a:avLst/>
-          </a:prstGeom>
-          <a:noFill/>
-          <a:ln/>
-        </p:spPr>
-        <p:txBody>
-          <a:bodyPr wrap="square" rtlCol="0" anchor="ctr"/>
-          <a:lstStyle/>
-          <a:p>
-            <a:pPr indent="0" marL="0">
-              <a:buNone/>
-            </a:pPr>
-            <a:r>
-              <a:rPr lang="en-US" sz="1400" b="1" dirty="0">
-                <a:solidFill>
-                  <a:srgbClr val="00A896"/>
-                </a:solidFill>
-                <a:latin typeface="Calibri" pitchFamily="34" charset="0"/>
-                <a:ea typeface="Calibri" pitchFamily="34" charset="-122"/>
-                <a:cs typeface="Calibri" pitchFamily="34" charset="-120"/>
-              </a:rPr>
-              <a:t>MONDE 3</a:t>
-            </a:r>
-            <a:endParaRPr lang="en-US" sz="1400" dirty="0"/>
-          </a:p>
-        </p:txBody>
-      </p:sp>
-      <p:sp>
-        <p:nvSpPr>
-          <p:cNvPr id="4" name="Text 2"/>
-          <p:cNvSpPr/>
-          <p:nvPr/>
-        </p:nvSpPr>
-        <p:spPr>
-          <a:xfrm>
-            <a:off x="731520" y="457200"/>
-            <a:ext cx="7315200" cy="457200"/>
-          </a:xfrm>
-          <a:prstGeom prst="rect">
-            <a:avLst/>
-          </a:prstGeom>
-          <a:noFill/>
-          <a:ln/>
-        </p:spPr>
-        <p:txBody>
-          <a:bodyPr wrap="square" rtlCol="0" anchor="ctr"/>
-          <a:lstStyle/>
-          <a:p>
-            <a:pPr indent="0" marL="0">
-              <a:buNone/>
-            </a:pPr>
-            <a:r>
-              <a:rPr lang="en-US" sz="1200" dirty="0">
-                <a:solidFill>
-                  <a:srgbClr val="E2E8F0"/>
-                </a:solidFill>
-                <a:latin typeface="Calibri" pitchFamily="34" charset="0"/>
-                <a:ea typeface="Calibri" pitchFamily="34" charset="-122"/>
-                <a:cs typeface="Calibri" pitchFamily="34" charset="-120"/>
-              </a:rPr>
-              <a:t>UNIT 19 : Data Structures &amp; Algorithms</a:t>
-            </a:r>
-            <a:endParaRPr lang="en-US" sz="1200" dirty="0"/>
-          </a:p>
-        </p:txBody>
-      </p:sp>
-      <p:sp>
-        <p:nvSpPr>
-          <p:cNvPr id="5" name="Text 3"/>
-          <p:cNvSpPr/>
-          <p:nvPr/>
-        </p:nvSpPr>
-        <p:spPr>
-          <a:xfrm>
-            <a:off x="731520" y="1645920"/>
-            <a:ext cx="7315200" cy="640080"/>
-          </a:xfrm>
-          <a:prstGeom prst="rect">
-            <a:avLst/>
-          </a:prstGeom>
-          <a:noFill/>
-          <a:ln/>
-        </p:spPr>
-        <p:txBody>
-          <a:bodyPr wrap="square" rtlCol="0" anchor="ctr"/>
-          <a:lstStyle/>
-          <a:p>
-            <a:pPr indent="0" marL="0">
-              <a:buNone/>
-            </a:pPr>
-            <a:r>
-              <a:rPr lang="en-US" sz="4400" b="1" dirty="0">
-                <a:solidFill>
-                  <a:srgbClr val="FFFFFF"/>
-                </a:solidFill>
-                <a:latin typeface="Trebuchet MS" pitchFamily="34" charset="0"/>
-                <a:ea typeface="Trebuchet MS" pitchFamily="34" charset="-122"/>
-                <a:cs typeface="Trebuchet MS" pitchFamily="34" charset="-120"/>
-              </a:rPr>
-              <a:t>Chapitre 9</a:t>
-            </a:r>
-            <a:endParaRPr lang="en-US" sz="4400" dirty="0"/>
-          </a:p>
-        </p:txBody>
-      </p:sp>
-      <p:sp>
-        <p:nvSpPr>
-          <p:cNvPr id="6" name="Text 4"/>
-          <p:cNvSpPr/>
-          <p:nvPr/>
-        </p:nvSpPr>
-        <p:spPr>
-          <a:xfrm>
-            <a:off x="731520" y="2286000"/>
-            <a:ext cx="7315200" cy="1097280"/>
-          </a:xfrm>
-          <a:prstGeom prst="rect">
-            <a:avLst/>
-          </a:prstGeom>
-          <a:noFill/>
-          <a:ln/>
-        </p:spPr>
-        <p:txBody>
-          <a:bodyPr wrap="square" rtlCol="0" anchor="ctr"/>
-          <a:lstStyle/>
-          <a:p>
-            <a:pPr indent="0" marL="0">
-              <a:buNone/>
-            </a:pPr>
-            <a:r>
-              <a:rPr lang="en-US" sz="3000" b="1" dirty="0">
-                <a:solidFill>
-                  <a:srgbClr val="00A896"/>
-                </a:solidFill>
-                <a:latin typeface="Trebuchet MS" pitchFamily="34" charset="0"/>
-                <a:ea typeface="Trebuchet MS" pitchFamily="34" charset="-122"/>
-                <a:cs typeface="Trebuchet MS" pitchFamily="34" charset="-120"/>
-              </a:rPr>
-              <a:t>Arbres binaires et</a:t>
-            </a:r>
-            <a:endParaRPr lang="en-US" sz="3000" dirty="0"/>
-          </a:p>
-          <a:p>
-            <a:pPr indent="0" marL="0">
-              <a:buNone/>
-            </a:pPr>
-            <a:r>
-              <a:rPr lang="en-US" sz="3000" b="1" dirty="0">
-                <a:solidFill>
-                  <a:srgbClr val="00A896"/>
-                </a:solidFill>
-                <a:latin typeface="Trebuchet MS" pitchFamily="34" charset="0"/>
-                <a:ea typeface="Trebuchet MS" pitchFamily="34" charset="-122"/>
-                <a:cs typeface="Trebuchet MS" pitchFamily="34" charset="-120"/>
-              </a:rPr>
-              <a:t>Algorithmes de tri</a:t>
-            </a:r>
-            <a:endParaRPr lang="en-US" sz="3000" dirty="0"/>
-          </a:p>
-        </p:txBody>
-      </p:sp>
-      <p:sp>
-        <p:nvSpPr>
-          <p:cNvPr id="7" name="Shape 5"/>
-          <p:cNvSpPr/>
-          <p:nvPr/>
-        </p:nvSpPr>
-        <p:spPr>
-          <a:xfrm>
-            <a:off x="731520" y="3657600"/>
-            <a:ext cx="2286000" cy="54864"/>
+            <a:ext cx="9144000" cy="73152"/>
           </a:xfrm>
           <a:prstGeom prst="rect">
             <a:avLst/>
@@ -1446,14 +1270,14 @@
       </p:sp>
       <p:sp>
         <p:nvSpPr>
-          <p:cNvPr id="8" name="Text 6"/>
+          <p:cNvPr id="3" name="Text 1"/>
           <p:cNvSpPr/>
           <p:nvPr/>
         </p:nvSpPr>
         <p:spPr>
           <a:xfrm>
-            <a:off x="731520" y="3840480"/>
-            <a:ext cx="7315200" cy="731520"/>
+            <a:off x="548640" y="365760"/>
+            <a:ext cx="2743200" cy="365760"/>
           </a:xfrm>
           <a:prstGeom prst="rect">
             <a:avLst/>
@@ -1469,19 +1293,195 @@
               <a:buNone/>
             </a:pPr>
             <a:r>
-              <a:rPr lang="en-US" sz="1300" i="1" dirty="0">
-                <a:solidFill>
-                  <a:srgbClr val="E2E8F0"/>
+              <a:rPr lang="en-US" sz="1200" b="1" spc="400" kern="0" dirty="0">
+                <a:solidFill>
+                  <a:srgbClr val="F97316"/>
                 </a:solidFill>
                 <a:latin typeface="Calibri" pitchFamily="34" charset="0"/>
                 <a:ea typeface="Calibri" pitchFamily="34" charset="-122"/>
                 <a:cs typeface="Calibri" pitchFamily="34" charset="-120"/>
               </a:rPr>
-              <a:t>P4b</a:t>
+              <a:t>MONDE 3</a:t>
+            </a:r>
+            <a:endParaRPr lang="en-US" sz="1200" dirty="0"/>
+          </a:p>
+        </p:txBody>
+      </p:sp>
+      <p:sp>
+        <p:nvSpPr>
+          <p:cNvPr id="4" name="Text 2"/>
+          <p:cNvSpPr/>
+          <p:nvPr/>
+        </p:nvSpPr>
+        <p:spPr>
+          <a:xfrm>
+            <a:off x="548640" y="731520"/>
+            <a:ext cx="7315200" cy="365760"/>
+          </a:xfrm>
+          <a:prstGeom prst="rect">
+            <a:avLst/>
+          </a:prstGeom>
+          <a:noFill/>
+          <a:ln/>
+        </p:spPr>
+        <p:txBody>
+          <a:bodyPr wrap="square" rtlCol="0" anchor="ctr"/>
+          <a:lstStyle/>
+          <a:p>
+            <a:pPr indent="0" marL="0">
+              <a:buNone/>
+            </a:pPr>
+            <a:r>
+              <a:rPr lang="en-US" sz="1100" dirty="0">
+                <a:solidFill>
+                  <a:srgbClr val="94A3B8"/>
+                </a:solidFill>
+                <a:latin typeface="Calibri" pitchFamily="34" charset="0"/>
+                <a:ea typeface="Calibri" pitchFamily="34" charset="-122"/>
+                <a:cs typeface="Calibri" pitchFamily="34" charset="-120"/>
+              </a:rPr>
+              <a:t>UNIT 19 : Data Structures &amp; Algorithms</a:t>
+            </a:r>
+            <a:endParaRPr lang="en-US" sz="1100" dirty="0"/>
+          </a:p>
+        </p:txBody>
+      </p:sp>
+      <p:sp>
+        <p:nvSpPr>
+          <p:cNvPr id="5" name="Text 3"/>
+          <p:cNvSpPr/>
+          <p:nvPr/>
+        </p:nvSpPr>
+        <p:spPr>
+          <a:xfrm>
+            <a:off x="548640" y="1371600"/>
+            <a:ext cx="8229600" cy="457200"/>
+          </a:xfrm>
+          <a:prstGeom prst="rect">
+            <a:avLst/>
+          </a:prstGeom>
+          <a:noFill/>
+          <a:ln/>
+        </p:spPr>
+        <p:txBody>
+          <a:bodyPr wrap="square" rtlCol="0" anchor="ctr"/>
+          <a:lstStyle/>
+          <a:p>
+            <a:pPr indent="0" marL="0">
+              <a:buNone/>
+            </a:pPr>
+            <a:r>
+              <a:rPr lang="en-US" sz="1400" b="1" dirty="0">
+                <a:solidFill>
+                  <a:srgbClr val="F97316"/>
+                </a:solidFill>
+                <a:latin typeface="Calibri" pitchFamily="34" charset="0"/>
+                <a:ea typeface="Calibri" pitchFamily="34" charset="-122"/>
+                <a:cs typeface="Calibri" pitchFamily="34" charset="-120"/>
+              </a:rPr>
+              <a:t>Chapitre 9</a:t>
+            </a:r>
+            <a:endParaRPr lang="en-US" sz="1400" dirty="0"/>
+          </a:p>
+        </p:txBody>
+      </p:sp>
+      <p:sp>
+        <p:nvSpPr>
+          <p:cNvPr id="6" name="Text 4"/>
+          <p:cNvSpPr/>
+          <p:nvPr/>
+        </p:nvSpPr>
+        <p:spPr>
+          <a:xfrm>
+            <a:off x="548640" y="2011680"/>
+            <a:ext cx="8229600" cy="1371600"/>
+          </a:xfrm>
+          <a:prstGeom prst="rect">
+            <a:avLst/>
+          </a:prstGeom>
+          <a:noFill/>
+          <a:ln/>
+        </p:spPr>
+        <p:txBody>
+          <a:bodyPr wrap="square" rtlCol="0" anchor="ctr"/>
+          <a:lstStyle/>
+          <a:p>
+            <a:pPr indent="0" marL="0">
+              <a:buNone/>
+            </a:pPr>
+            <a:r>
+              <a:rPr lang="en-US" sz="3600" b="1" dirty="0">
+                <a:solidFill>
+                  <a:srgbClr val="FFFFFF"/>
+                </a:solidFill>
+                <a:latin typeface="Calibri" pitchFamily="34" charset="0"/>
+                <a:ea typeface="Calibri" pitchFamily="34" charset="-122"/>
+                <a:cs typeface="Calibri" pitchFamily="34" charset="-120"/>
+              </a:rPr>
+              <a:t>Arbres BST &amp; Algorithmes de Tri</a:t>
+            </a:r>
+            <a:endParaRPr lang="en-US" sz="3600" dirty="0"/>
+          </a:p>
+        </p:txBody>
+      </p:sp>
+      <p:sp>
+        <p:nvSpPr>
+          <p:cNvPr id="7" name="Text 5"/>
+          <p:cNvSpPr/>
+          <p:nvPr/>
+        </p:nvSpPr>
+        <p:spPr>
+          <a:xfrm>
+            <a:off x="548640" y="3657600"/>
+            <a:ext cx="8229600" cy="365760"/>
+          </a:xfrm>
+          <a:prstGeom prst="rect">
+            <a:avLst/>
+          </a:prstGeom>
+          <a:noFill/>
+          <a:ln/>
+        </p:spPr>
+        <p:txBody>
+          <a:bodyPr wrap="square" rtlCol="0" anchor="ctr"/>
+          <a:lstStyle/>
+          <a:p>
+            <a:pPr indent="0" marL="0">
+              <a:buNone/>
+            </a:pPr>
+            <a:r>
+              <a:rPr lang="en-US" sz="1300" dirty="0">
+                <a:solidFill>
+                  <a:srgbClr val="94A3B8"/>
+                </a:solidFill>
+                <a:latin typeface="Calibri" pitchFamily="34" charset="0"/>
+                <a:ea typeface="Calibri" pitchFamily="34" charset="-122"/>
+                <a:cs typeface="Calibri" pitchFamily="34" charset="-120"/>
+              </a:rPr>
+              <a:t>Critère P4b — Trees, sorting, traversal</a:t>
             </a:r>
             <a:endParaRPr lang="en-US" sz="1300" dirty="0"/>
           </a:p>
         </p:txBody>
+      </p:sp>
+      <p:sp>
+        <p:nvSpPr>
+          <p:cNvPr id="8" name="Shape 6"/>
+          <p:cNvSpPr/>
+          <p:nvPr/>
+        </p:nvSpPr>
+        <p:spPr>
+          <a:xfrm>
+            <a:off x="0" y="5074920"/>
+            <a:ext cx="9144000" cy="73152"/>
+          </a:xfrm>
+          <a:prstGeom prst="rect">
+            <a:avLst/>
+          </a:prstGeom>
+          <a:solidFill>
+            <a:srgbClr val="F97316"/>
+          </a:solidFill>
+          <a:ln/>
+        </p:spPr>
       </p:sp>
     </p:spTree>
   </p:cSld>
@@ -1497,7 +1497,7 @@
     <p:bg>
       <p:bgPr>
         <a:solidFill>
-          <a:srgbClr val="F8FAFC"/>
+          <a:srgbClr val="1A0D00"/>
         </a:solidFill>
       </p:bgPr>
     </p:bg>
@@ -1524,13 +1524,13 @@
         <p:spPr>
           <a:xfrm>
             <a:off x="0" y="0"/>
-            <a:ext cx="109728" cy="5143500"/>
+            <a:ext cx="9144000" cy="54864"/>
           </a:xfrm>
           <a:prstGeom prst="rect">
             <a:avLst/>
           </a:prstGeom>
           <a:solidFill>
-            <a:srgbClr val="DC2626"/>
+            <a:srgbClr val="F97316"/>
           </a:solidFill>
           <a:ln/>
         </p:spPr>
@@ -1543,7 +1543,7 @@
         </p:nvSpPr>
         <p:spPr>
           <a:xfrm>
-            <a:off x="457200" y="274320"/>
+            <a:off x="548640" y="274320"/>
             <a:ext cx="8229600" cy="548640"/>
           </a:xfrm>
           <a:prstGeom prst="rect">
@@ -1560,17 +1560,17 @@
               <a:buNone/>
             </a:pPr>
             <a:r>
-              <a:rPr lang="en-US" sz="2600" b="1" dirty="0">
-                <a:solidFill>
-                  <a:srgbClr val="1B2A4A"/>
-                </a:solidFill>
-                <a:latin typeface="Trebuchet MS" pitchFamily="34" charset="0"/>
-                <a:ea typeface="Trebuchet MS" pitchFamily="34" charset="-122"/>
-                <a:cs typeface="Trebuchet MS" pitchFamily="34" charset="-120"/>
-              </a:rPr>
-              <a:t>Arbre binaire : vocabulaire</a:t>
-            </a:r>
-            <a:endParaRPr lang="en-US" sz="2600" dirty="0"/>
+              <a:rPr lang="en-US" sz="2400" b="1" dirty="0">
+                <a:solidFill>
+                  <a:srgbClr val="FFFFFF"/>
+                </a:solidFill>
+                <a:latin typeface="Calibri" pitchFamily="34" charset="0"/>
+                <a:ea typeface="Calibri" pitchFamily="34" charset="-122"/>
+                <a:cs typeface="Calibri" pitchFamily="34" charset="-120"/>
+              </a:rPr>
+              <a:t>Arbre Binaire de Recherche (BST)</a:t>
+            </a:r>
+            <a:endParaRPr lang="en-US" sz="2400" dirty="0"/>
           </a:p>
         </p:txBody>
       </p:sp>
@@ -1582,8 +1582,8 @@
         </p:nvSpPr>
         <p:spPr>
           <a:xfrm>
-            <a:off x="640080" y="1005840"/>
-            <a:ext cx="7772400" cy="457200"/>
+            <a:off x="548640" y="1005840"/>
+            <a:ext cx="3840480" cy="3200400"/>
           </a:xfrm>
           <a:prstGeom prst="rect">
             <a:avLst/>
@@ -1592,7 +1592,7 @@
           <a:ln/>
         </p:spPr>
         <p:txBody>
-          <a:bodyPr wrap="square" rtlCol="0" anchor="ctr"/>
+          <a:bodyPr wrap="square" rtlCol="0" anchor="t"/>
           <a:lstStyle/>
           <a:p>
             <a:pPr marL="342900" indent="-342900">
@@ -1600,59 +1600,113 @@
               <a:buChar char="•"/>
             </a:pPr>
             <a:r>
-              <a:rPr lang="en-US" sz="1400" dirty="0">
-                <a:solidFill>
-                  <a:srgbClr val="334155"/>
+              <a:rPr lang="en-US" sz="1300" dirty="0">
+                <a:solidFill>
+                  <a:srgbClr val="E2E8F0"/>
                 </a:solidFill>
                 <a:latin typeface="Calibri" pitchFamily="34" charset="0"/>
                 <a:ea typeface="Calibri" pitchFamily="34" charset="-122"/>
                 <a:cs typeface="Calibri" pitchFamily="34" charset="-120"/>
               </a:rPr>
-              <a:t>RACINE (root) : le noeud au sommet de l'arbre</a:t>
-            </a:r>
-            <a:endParaRPr lang="en-US" sz="1400" dirty="0"/>
-          </a:p>
-        </p:txBody>
-      </p:sp>
-      <p:sp>
-        <p:nvSpPr>
-          <p:cNvPr id="5" name="Text 3"/>
-          <p:cNvSpPr/>
-          <p:nvPr/>
-        </p:nvSpPr>
-        <p:spPr>
-          <a:xfrm>
-            <a:off x="640080" y="1554480"/>
-            <a:ext cx="7772400" cy="457200"/>
-          </a:xfrm>
-          <a:prstGeom prst="rect">
-            <a:avLst/>
-          </a:prstGeom>
-          <a:noFill/>
-          <a:ln/>
-        </p:spPr>
-        <p:txBody>
-          <a:bodyPr wrap="square" rtlCol="0" anchor="ctr"/>
-          <a:lstStyle/>
+              <a:t>Chaque nœud a au plus 2 enfants (gauche, droite)</a:t>
+            </a:r>
+            <a:endParaRPr lang="en-US" sz="1300" dirty="0"/>
+          </a:p>
           <a:p>
             <a:pPr marL="342900" indent="-342900">
               <a:buSzPct val="100000"/>
               <a:buChar char="•"/>
             </a:pPr>
             <a:r>
-              <a:rPr lang="en-US" sz="1400" dirty="0">
-                <a:solidFill>
-                  <a:srgbClr val="334155"/>
+              <a:rPr lang="en-US" sz="1300" dirty="0">
+                <a:solidFill>
+                  <a:srgbClr val="E2E8F0"/>
                 </a:solidFill>
                 <a:latin typeface="Calibri" pitchFamily="34" charset="0"/>
                 <a:ea typeface="Calibri" pitchFamily="34" charset="-122"/>
                 <a:cs typeface="Calibri" pitchFamily="34" charset="-120"/>
               </a:rPr>
-              <a:t>NOEUD : contient une donnée + référence vers enfant gauche et droit</a:t>
-            </a:r>
-            <a:endParaRPr lang="en-US" sz="1400" dirty="0"/>
-          </a:p>
-        </p:txBody>
+              <a:t>Propriété BST : gauche &lt; racine &lt; droite</a:t>
+            </a:r>
+            <a:endParaRPr lang="en-US" sz="1300" dirty="0"/>
+          </a:p>
+          <a:p>
+            <a:pPr marL="342900" indent="-342900">
+              <a:buSzPct val="100000"/>
+              <a:buChar char="•"/>
+            </a:pPr>
+            <a:r>
+              <a:rPr lang="en-US" sz="1300" dirty="0">
+                <a:solidFill>
+                  <a:srgbClr val="E2E8F0"/>
+                </a:solidFill>
+                <a:latin typeface="Calibri" pitchFamily="34" charset="0"/>
+                <a:ea typeface="Calibri" pitchFamily="34" charset="-122"/>
+                <a:cs typeface="Calibri" pitchFamily="34" charset="-120"/>
+              </a:rPr>
+              <a:t>Recherche, insertion : O(log n) si équilibré</a:t>
+            </a:r>
+            <a:endParaRPr lang="en-US" sz="1300" dirty="0"/>
+          </a:p>
+          <a:p>
+            <a:pPr marL="342900" indent="-342900">
+              <a:buSzPct val="100000"/>
+              <a:buChar char="•"/>
+            </a:pPr>
+            <a:r>
+              <a:rPr lang="en-US" sz="1300" dirty="0">
+                <a:solidFill>
+                  <a:srgbClr val="E2E8F0"/>
+                </a:solidFill>
+                <a:latin typeface="Calibri" pitchFamily="34" charset="0"/>
+                <a:ea typeface="Calibri" pitchFamily="34" charset="-122"/>
+                <a:cs typeface="Calibri" pitchFamily="34" charset="-120"/>
+              </a:rPr>
+              <a:t>3 parcours : Inorder (G-R-D = trié), Preorder (R-G-D), Postorder (G-D-R)</a:t>
+            </a:r>
+            <a:endParaRPr lang="en-US" sz="1300" dirty="0"/>
+          </a:p>
+          <a:p>
+            <a:pPr marL="342900" indent="-342900">
+              <a:buSzPct val="100000"/>
+              <a:buChar char="•"/>
+            </a:pPr>
+            <a:r>
+              <a:rPr lang="en-US" sz="1300" dirty="0">
+                <a:solidFill>
+                  <a:srgbClr val="E2E8F0"/>
+                </a:solidFill>
+                <a:latin typeface="Calibri" pitchFamily="34" charset="0"/>
+                <a:ea typeface="Calibri" pitchFamily="34" charset="-122"/>
+                <a:cs typeface="Calibri" pitchFamily="34" charset="-120"/>
+              </a:rPr>
+              <a:t>Pire cas : arbre dégénéré → O(n) = liste chaînée</a:t>
+            </a:r>
+            <a:endParaRPr lang="en-US" sz="1300" dirty="0"/>
+          </a:p>
+        </p:txBody>
+      </p:sp>
+      <p:sp>
+        <p:nvSpPr>
+          <p:cNvPr id="5" name="Shape 3"/>
+          <p:cNvSpPr/>
+          <p:nvPr/>
+        </p:nvSpPr>
+        <p:spPr>
+          <a:xfrm>
+            <a:off x="4754880" y="1005840"/>
+            <a:ext cx="4023360" cy="3200400"/>
+          </a:xfrm>
+          <a:prstGeom prst="roundRect">
+            <a:avLst>
+              <a:gd name="adj" fmla="val 2857"/>
+            </a:avLst>
+          </a:prstGeom>
+          <a:solidFill>
+            <a:srgbClr val="0D1117"/>
+          </a:solidFill>
+          <a:ln/>
+        </p:spPr>
       </p:sp>
       <p:sp>
         <p:nvSpPr>
@@ -1662,8 +1716,8 @@
         </p:nvSpPr>
         <p:spPr>
           <a:xfrm>
-            <a:off x="640080" y="2103120"/>
-            <a:ext cx="7772400" cy="457200"/>
+            <a:off x="4937760" y="1143000"/>
+            <a:ext cx="3657600" cy="2926080"/>
           </a:xfrm>
           <a:prstGeom prst="rect">
             <a:avLst/>
@@ -1672,145 +1726,149 @@
           <a:ln/>
         </p:spPr>
         <p:txBody>
-          <a:bodyPr wrap="square" rtlCol="0" anchor="ctr"/>
-          <a:lstStyle/>
-          <a:p>
-            <a:pPr marL="342900" indent="-342900">
-              <a:buSzPct val="100000"/>
-              <a:buChar char="•"/>
-            </a:pPr>
-            <a:r>
-              <a:rPr lang="en-US" sz="1400" dirty="0">
-                <a:solidFill>
-                  <a:srgbClr val="334155"/>
-                </a:solidFill>
-                <a:latin typeface="Calibri" pitchFamily="34" charset="0"/>
-                <a:ea typeface="Calibri" pitchFamily="34" charset="-122"/>
-                <a:cs typeface="Calibri" pitchFamily="34" charset="-120"/>
-              </a:rPr>
-              <a:t>FEUILLE (leaf) : noeud sans enfants</a:t>
-            </a:r>
-            <a:endParaRPr lang="en-US" sz="1400" dirty="0"/>
-          </a:p>
-        </p:txBody>
-      </p:sp>
-      <p:sp>
-        <p:nvSpPr>
-          <p:cNvPr id="7" name="Text 5"/>
-          <p:cNvSpPr/>
-          <p:nvPr/>
-        </p:nvSpPr>
-        <p:spPr>
-          <a:xfrm>
-            <a:off x="640080" y="2651760"/>
-            <a:ext cx="7772400" cy="457200"/>
-          </a:xfrm>
-          <a:prstGeom prst="rect">
-            <a:avLst/>
-          </a:prstGeom>
-          <a:noFill/>
-          <a:ln/>
-        </p:spPr>
-        <p:txBody>
-          <a:bodyPr wrap="square" rtlCol="0" anchor="ctr"/>
-          <a:lstStyle/>
-          <a:p>
-            <a:pPr marL="342900" indent="-342900">
-              <a:buSzPct val="100000"/>
-              <a:buChar char="•"/>
-            </a:pPr>
-            <a:r>
-              <a:rPr lang="en-US" sz="1400" dirty="0">
-                <a:solidFill>
-                  <a:srgbClr val="334155"/>
-                </a:solidFill>
-                <a:latin typeface="Calibri" pitchFamily="34" charset="0"/>
-                <a:ea typeface="Calibri" pitchFamily="34" charset="-122"/>
-                <a:cs typeface="Calibri" pitchFamily="34" charset="-120"/>
-              </a:rPr>
-              <a:t>BST (Binary Search Tree) : gauche &lt; racine &lt; droite → recherche O(log n)</a:t>
-            </a:r>
-            <a:endParaRPr lang="en-US" sz="1400" dirty="0"/>
-          </a:p>
-        </p:txBody>
-      </p:sp>
-      <p:sp>
-        <p:nvSpPr>
-          <p:cNvPr id="8" name="Text 6"/>
-          <p:cNvSpPr/>
-          <p:nvPr/>
-        </p:nvSpPr>
-        <p:spPr>
-          <a:xfrm>
-            <a:off x="640080" y="3200400"/>
-            <a:ext cx="7772400" cy="457200"/>
-          </a:xfrm>
-          <a:prstGeom prst="rect">
-            <a:avLst/>
-          </a:prstGeom>
-          <a:noFill/>
-          <a:ln/>
-        </p:spPr>
-        <p:txBody>
-          <a:bodyPr wrap="square" rtlCol="0" anchor="ctr"/>
-          <a:lstStyle/>
-          <a:p>
-            <a:pPr marL="342900" indent="-342900">
-              <a:buSzPct val="100000"/>
-              <a:buChar char="•"/>
-            </a:pPr>
-            <a:r>
-              <a:rPr lang="en-US" sz="1400" dirty="0">
-                <a:solidFill>
-                  <a:srgbClr val="334155"/>
-                </a:solidFill>
-                <a:latin typeface="Calibri" pitchFamily="34" charset="0"/>
-                <a:ea typeface="Calibri" pitchFamily="34" charset="-122"/>
-                <a:cs typeface="Calibri" pitchFamily="34" charset="-120"/>
-              </a:rPr>
-              <a:t>PROFONDEUR : nombre d'arêtes de la racine au noeud</a:t>
-            </a:r>
-            <a:endParaRPr lang="en-US" sz="1400" dirty="0"/>
-          </a:p>
-        </p:txBody>
-      </p:sp>
-      <p:sp>
-        <p:nvSpPr>
-          <p:cNvPr id="9" name="Text 7"/>
-          <p:cNvSpPr/>
-          <p:nvPr/>
-        </p:nvSpPr>
-        <p:spPr>
-          <a:xfrm>
-            <a:off x="640080" y="3749040"/>
-            <a:ext cx="7772400" cy="457200"/>
-          </a:xfrm>
-          <a:prstGeom prst="rect">
-            <a:avLst/>
-          </a:prstGeom>
-          <a:noFill/>
-          <a:ln/>
-        </p:spPr>
-        <p:txBody>
-          <a:bodyPr wrap="square" rtlCol="0" anchor="ctr"/>
-          <a:lstStyle/>
-          <a:p>
-            <a:pPr marL="342900" indent="-342900">
-              <a:buSzPct val="100000"/>
-              <a:buChar char="•"/>
-            </a:pPr>
-            <a:r>
-              <a:rPr lang="en-US" sz="1400" dirty="0">
-                <a:solidFill>
-                  <a:srgbClr val="334155"/>
-                </a:solidFill>
-                <a:latin typeface="Calibri" pitchFamily="34" charset="0"/>
-                <a:ea typeface="Calibri" pitchFamily="34" charset="-122"/>
-                <a:cs typeface="Calibri" pitchFamily="34" charset="-120"/>
-              </a:rPr>
-              <a:t>3 parcours : Inorder (G-R-D = trié), Preorder (R-G-D = copie), Postorder (G-D-R = suppression)</a:t>
-            </a:r>
-            <a:endParaRPr lang="en-US" sz="1400" dirty="0"/>
+          <a:bodyPr wrap="square" rtlCol="0" anchor="t"/>
+          <a:lstStyle/>
+          <a:p>
+            <a:pPr indent="0" marL="0">
+              <a:buNone/>
+            </a:pPr>
+            <a:r>
+              <a:rPr lang="en-US" sz="1000" dirty="0">
+                <a:solidFill>
+                  <a:srgbClr val="A5F3FC"/>
+                </a:solidFill>
+                <a:latin typeface="Consolas" pitchFamily="34" charset="0"/>
+                <a:ea typeface="Consolas" pitchFamily="34" charset="-122"/>
+                <a:cs typeface="Consolas" pitchFamily="34" charset="-120"/>
+              </a:rPr>
+              <a:t>//        50</a:t>
+            </a:r>
+            <a:endParaRPr lang="en-US" sz="1000" dirty="0"/>
+          </a:p>
+          <a:p>
+            <a:pPr indent="0" marL="0">
+              <a:buNone/>
+            </a:pPr>
+            <a:r>
+              <a:rPr lang="en-US" sz="1000" dirty="0">
+                <a:solidFill>
+                  <a:srgbClr val="A5F3FC"/>
+                </a:solidFill>
+                <a:latin typeface="Consolas" pitchFamily="34" charset="0"/>
+                <a:ea typeface="Consolas" pitchFamily="34" charset="-122"/>
+                <a:cs typeface="Consolas" pitchFamily="34" charset="-120"/>
+              </a:rPr>
+              <a:t>//       /  \</a:t>
+            </a:r>
+            <a:endParaRPr lang="en-US" sz="1000" dirty="0"/>
+          </a:p>
+          <a:p>
+            <a:pPr indent="0" marL="0">
+              <a:buNone/>
+            </a:pPr>
+            <a:r>
+              <a:rPr lang="en-US" sz="1000" dirty="0">
+                <a:solidFill>
+                  <a:srgbClr val="A5F3FC"/>
+                </a:solidFill>
+                <a:latin typeface="Consolas" pitchFamily="34" charset="0"/>
+                <a:ea typeface="Consolas" pitchFamily="34" charset="-122"/>
+                <a:cs typeface="Consolas" pitchFamily="34" charset="-120"/>
+              </a:rPr>
+              <a:t>//     30    70</a:t>
+            </a:r>
+            <a:endParaRPr lang="en-US" sz="1000" dirty="0"/>
+          </a:p>
+          <a:p>
+            <a:pPr indent="0" marL="0">
+              <a:buNone/>
+            </a:pPr>
+            <a:r>
+              <a:rPr lang="en-US" sz="1000" dirty="0">
+                <a:solidFill>
+                  <a:srgbClr val="A5F3FC"/>
+                </a:solidFill>
+                <a:latin typeface="Consolas" pitchFamily="34" charset="0"/>
+                <a:ea typeface="Consolas" pitchFamily="34" charset="-122"/>
+                <a:cs typeface="Consolas" pitchFamily="34" charset="-120"/>
+              </a:rPr>
+              <a:t>//    / \</a:t>
+            </a:r>
+            <a:endParaRPr lang="en-US" sz="1000" dirty="0"/>
+          </a:p>
+          <a:p>
+            <a:pPr indent="0" marL="0">
+              <a:buNone/>
+            </a:pPr>
+            <a:r>
+              <a:rPr lang="en-US" sz="1000" dirty="0">
+                <a:solidFill>
+                  <a:srgbClr val="A5F3FC"/>
+                </a:solidFill>
+                <a:latin typeface="Consolas" pitchFamily="34" charset="0"/>
+                <a:ea typeface="Consolas" pitchFamily="34" charset="-122"/>
+                <a:cs typeface="Consolas" pitchFamily="34" charset="-120"/>
+              </a:rPr>
+              <a:t>//  20   40</a:t>
+            </a:r>
+            <a:endParaRPr lang="en-US" sz="1000" dirty="0"/>
+          </a:p>
+          <a:p>
+            <a:pPr indent="0" marL="0">
+              <a:buNone/>
+            </a:pPr>
+            <a:endParaRPr lang="en-US" sz="1000" dirty="0"/>
+          </a:p>
+          <a:p>
+            <a:pPr indent="0" marL="0">
+              <a:buNone/>
+            </a:pPr>
+            <a:r>
+              <a:rPr lang="en-US" sz="1000" dirty="0">
+                <a:solidFill>
+                  <a:srgbClr val="A5F3FC"/>
+                </a:solidFill>
+                <a:latin typeface="Consolas" pitchFamily="34" charset="0"/>
+                <a:ea typeface="Consolas" pitchFamily="34" charset="-122"/>
+                <a:cs typeface="Consolas" pitchFamily="34" charset="-120"/>
+              </a:rPr>
+              <a:t>// Inorder:   20, 30, 40, 50, 70</a:t>
+            </a:r>
+            <a:endParaRPr lang="en-US" sz="1000" dirty="0"/>
+          </a:p>
+          <a:p>
+            <a:pPr indent="0" marL="0">
+              <a:buNone/>
+            </a:pPr>
+            <a:r>
+              <a:rPr lang="en-US" sz="1000" dirty="0">
+                <a:solidFill>
+                  <a:srgbClr val="A5F3FC"/>
+                </a:solidFill>
+                <a:latin typeface="Consolas" pitchFamily="34" charset="0"/>
+                <a:ea typeface="Consolas" pitchFamily="34" charset="-122"/>
+                <a:cs typeface="Consolas" pitchFamily="34" charset="-120"/>
+              </a:rPr>
+              <a:t>// Preorder:  50, 30, 20, 40, 70</a:t>
+            </a:r>
+            <a:endParaRPr lang="en-US" sz="1000" dirty="0"/>
+          </a:p>
+          <a:p>
+            <a:pPr indent="0" marL="0">
+              <a:buNone/>
+            </a:pPr>
+            <a:r>
+              <a:rPr lang="en-US" sz="1000" dirty="0">
+                <a:solidFill>
+                  <a:srgbClr val="A5F3FC"/>
+                </a:solidFill>
+                <a:latin typeface="Consolas" pitchFamily="34" charset="0"/>
+                <a:ea typeface="Consolas" pitchFamily="34" charset="-122"/>
+                <a:cs typeface="Consolas" pitchFamily="34" charset="-120"/>
+              </a:rPr>
+              <a:t>// Postorder: 20, 40, 30, 70, 50</a:t>
+            </a:r>
+            <a:endParaRPr lang="en-US" sz="1000" dirty="0"/>
           </a:p>
         </p:txBody>
       </p:sp>
@@ -1828,7 +1886,7 @@
     <p:bg>
       <p:bgPr>
         <a:solidFill>
-          <a:srgbClr val="F8FAFC"/>
+          <a:srgbClr val="1A0D00"/>
         </a:solidFill>
       </p:bgPr>
     </p:bg>
@@ -1855,13 +1913,13 @@
         <p:spPr>
           <a:xfrm>
             <a:off x="0" y="0"/>
-            <a:ext cx="109728" cy="5143500"/>
+            <a:ext cx="9144000" cy="54864"/>
           </a:xfrm>
           <a:prstGeom prst="rect">
             <a:avLst/>
           </a:prstGeom>
           <a:solidFill>
-            <a:srgbClr val="DC2626"/>
+            <a:srgbClr val="F97316"/>
           </a:solidFill>
           <a:ln/>
         </p:spPr>
@@ -1874,8 +1932,8 @@
         </p:nvSpPr>
         <p:spPr>
           <a:xfrm>
-            <a:off x="457200" y="274320"/>
-            <a:ext cx="8229600" cy="457200"/>
+            <a:off x="548640" y="274320"/>
+            <a:ext cx="8229600" cy="548640"/>
           </a:xfrm>
           <a:prstGeom prst="rect">
             <a:avLst/>
@@ -1891,50 +1949,30 @@
               <a:buNone/>
             </a:pPr>
             <a:r>
-              <a:rPr lang="en-US" sz="2600" b="1" dirty="0">
-                <a:solidFill>
-                  <a:srgbClr val="1B2A4A"/>
-                </a:solidFill>
-                <a:latin typeface="Trebuchet MS" pitchFamily="34" charset="0"/>
-                <a:ea typeface="Trebuchet MS" pitchFamily="34" charset="-122"/>
-                <a:cs typeface="Trebuchet MS" pitchFamily="34" charset="-120"/>
-              </a:rPr>
-              <a:t>BST en Java : structure</a:t>
-            </a:r>
-            <a:endParaRPr lang="en-US" sz="2600" dirty="0"/>
-          </a:p>
-        </p:txBody>
-      </p:sp>
-      <p:sp>
-        <p:nvSpPr>
-          <p:cNvPr id="4" name="Shape 2"/>
+              <a:rPr lang="en-US" sz="2400" b="1" dirty="0">
+                <a:solidFill>
+                  <a:srgbClr val="FFFFFF"/>
+                </a:solidFill>
+                <a:latin typeface="Calibri" pitchFamily="34" charset="0"/>
+                <a:ea typeface="Calibri" pitchFamily="34" charset="-122"/>
+                <a:cs typeface="Calibri" pitchFamily="34" charset="-120"/>
+              </a:rPr>
+              <a:t>Algorithmes de Tri</a:t>
+            </a:r>
+            <a:endParaRPr lang="en-US" sz="2400" dirty="0"/>
+          </a:p>
+        </p:txBody>
+      </p:sp>
+      <p:sp>
+        <p:nvSpPr>
+          <p:cNvPr id="4" name="Text 2"/>
           <p:cNvSpPr/>
           <p:nvPr/>
         </p:nvSpPr>
         <p:spPr>
           <a:xfrm>
-            <a:off x="457200" y="822960"/>
-            <a:ext cx="8229600" cy="3840480"/>
-          </a:xfrm>
-          <a:prstGeom prst="rect">
-            <a:avLst/>
-          </a:prstGeom>
-          <a:solidFill>
-            <a:srgbClr val="1E293B"/>
-          </a:solidFill>
-          <a:ln/>
-        </p:spPr>
-      </p:sp>
-      <p:sp>
-        <p:nvSpPr>
-          <p:cNvPr id="5" name="Text 3"/>
-          <p:cNvSpPr/>
-          <p:nvPr/>
-        </p:nvSpPr>
-        <p:spPr>
-          <a:xfrm>
-            <a:off x="640080" y="914400"/>
-            <a:ext cx="7863840" cy="3657600"/>
+            <a:off x="548640" y="1005840"/>
+            <a:ext cx="8046720" cy="3657600"/>
           </a:xfrm>
           <a:prstGeom prst="rect">
             <a:avLst/>
@@ -1943,574 +1981,112 @@
           <a:ln/>
         </p:spPr>
         <p:txBody>
-          <a:bodyPr wrap="square" rtlCol="0" anchor="ctr"/>
-          <a:lstStyle/>
-          <a:p>
-            <a:pPr indent="0" marL="0">
-              <a:buNone/>
-            </a:pPr>
-            <a:r>
-              <a:rPr lang="en-US" sz="1100" dirty="0">
-                <a:solidFill>
-                  <a:srgbClr val="7C3AED"/>
-                </a:solidFill>
-                <a:latin typeface="Consolas" pitchFamily="34" charset="0"/>
-                <a:ea typeface="Consolas" pitchFamily="34" charset="-122"/>
-                <a:cs typeface="Consolas" pitchFamily="34" charset="-120"/>
-              </a:rPr>
-              <a:t>class TreeNode {</a:t>
-            </a:r>
-            <a:endParaRPr lang="en-US" sz="1100" dirty="0"/>
-          </a:p>
-          <a:p>
-            <a:pPr indent="0" marL="0">
-              <a:buNone/>
-            </a:pPr>
-            <a:r>
-              <a:rPr lang="en-US" sz="1100" dirty="0">
+          <a:bodyPr wrap="square" rtlCol="0" anchor="t"/>
+          <a:lstStyle/>
+          <a:p>
+            <a:pPr marL="342900" indent="-342900">
+              <a:lnSpc>
+                <a:spcPct val="130000"/>
+              </a:lnSpc>
+              <a:buSzPct val="100000"/>
+              <a:buChar char="•"/>
+            </a:pPr>
+            <a:r>
+              <a:rPr lang="en-US" sz="1400" dirty="0">
                 <a:solidFill>
                   <a:srgbClr val="E2E8F0"/>
                 </a:solidFill>
-                <a:latin typeface="Consolas" pitchFamily="34" charset="0"/>
-                <a:ea typeface="Consolas" pitchFamily="34" charset="-122"/>
-                <a:cs typeface="Consolas" pitchFamily="34" charset="-120"/>
-              </a:rPr>
-              <a:t>    int value;</a:t>
-            </a:r>
-            <a:endParaRPr lang="en-US" sz="1100" dirty="0"/>
-          </a:p>
-          <a:p>
-            <a:pPr indent="0" marL="0">
-              <a:buNone/>
-            </a:pPr>
-            <a:r>
-              <a:rPr lang="en-US" sz="1100" dirty="0">
+                <a:latin typeface="Calibri" pitchFamily="34" charset="0"/>
+                <a:ea typeface="Calibri" pitchFamily="34" charset="-122"/>
+                <a:cs typeface="Calibri" pitchFamily="34" charset="-120"/>
+              </a:rPr>
+              <a:t>Bubble Sort : comparer paires adjacentes → O(n²)</a:t>
+            </a:r>
+            <a:endParaRPr lang="en-US" sz="1400" dirty="0"/>
+          </a:p>
+          <a:p>
+            <a:pPr marL="342900" indent="-342900">
+              <a:lnSpc>
+                <a:spcPct val="130000"/>
+              </a:lnSpc>
+              <a:buSzPct val="100000"/>
+              <a:buChar char="•"/>
+            </a:pPr>
+            <a:r>
+              <a:rPr lang="en-US" sz="1400" dirty="0">
                 <a:solidFill>
                   <a:srgbClr val="E2E8F0"/>
                 </a:solidFill>
-                <a:latin typeface="Consolas" pitchFamily="34" charset="0"/>
-                <a:ea typeface="Consolas" pitchFamily="34" charset="-122"/>
-                <a:cs typeface="Consolas" pitchFamily="34" charset="-120"/>
-              </a:rPr>
-              <a:t>    TreeNode left, right;</a:t>
-            </a:r>
-            <a:endParaRPr lang="en-US" sz="1100" dirty="0"/>
-          </a:p>
-          <a:p>
-            <a:pPr indent="0" marL="0">
-              <a:buNone/>
-            </a:pPr>
-            <a:r>
-              <a:rPr lang="en-US" sz="1100" dirty="0">
+                <a:latin typeface="Calibri" pitchFamily="34" charset="0"/>
+                <a:ea typeface="Calibri" pitchFamily="34" charset="-122"/>
+                <a:cs typeface="Calibri" pitchFamily="34" charset="-120"/>
+              </a:rPr>
+              <a:t>Insertion Sort : insérer chaque élément à sa place → O(n²) mais O(n) si presque trié</a:t>
+            </a:r>
+            <a:endParaRPr lang="en-US" sz="1400" dirty="0"/>
+          </a:p>
+          <a:p>
+            <a:pPr marL="342900" indent="-342900">
+              <a:lnSpc>
+                <a:spcPct val="130000"/>
+              </a:lnSpc>
+              <a:buSzPct val="100000"/>
+              <a:buChar char="•"/>
+            </a:pPr>
+            <a:r>
+              <a:rPr lang="en-US" sz="1400" dirty="0">
                 <a:solidFill>
                   <a:srgbClr val="E2E8F0"/>
                 </a:solidFill>
-                <a:latin typeface="Consolas" pitchFamily="34" charset="0"/>
-                <a:ea typeface="Consolas" pitchFamily="34" charset="-122"/>
-                <a:cs typeface="Consolas" pitchFamily="34" charset="-120"/>
-              </a:rPr>
-              <a:t>    </a:t>
-            </a:r>
-            <a:endParaRPr lang="en-US" sz="1100" dirty="0"/>
-          </a:p>
-          <a:p>
-            <a:pPr indent="0" marL="0">
-              <a:buNone/>
-            </a:pPr>
-            <a:r>
-              <a:rPr lang="en-US" sz="1100" dirty="0">
+                <a:latin typeface="Calibri" pitchFamily="34" charset="0"/>
+                <a:ea typeface="Calibri" pitchFamily="34" charset="-122"/>
+                <a:cs typeface="Calibri" pitchFamily="34" charset="-120"/>
+              </a:rPr>
+              <a:t>Quick Sort : partitionner autour d'un pivot → O(n log n) moyen, O(n²) pire</a:t>
+            </a:r>
+            <a:endParaRPr lang="en-US" sz="1400" dirty="0"/>
+          </a:p>
+          <a:p>
+            <a:pPr marL="342900" indent="-342900">
+              <a:lnSpc>
+                <a:spcPct val="130000"/>
+              </a:lnSpc>
+              <a:buSzPct val="100000"/>
+              <a:buChar char="•"/>
+            </a:pPr>
+            <a:r>
+              <a:rPr lang="en-US" sz="1400" dirty="0">
                 <a:solidFill>
                   <a:srgbClr val="E2E8F0"/>
                 </a:solidFill>
-                <a:latin typeface="Consolas" pitchFamily="34" charset="0"/>
-                <a:ea typeface="Consolas" pitchFamily="34" charset="-122"/>
-                <a:cs typeface="Consolas" pitchFamily="34" charset="-120"/>
-              </a:rPr>
-              <a:t>    TreeNode(int value) {</a:t>
-            </a:r>
-            <a:endParaRPr lang="en-US" sz="1100" dirty="0"/>
-          </a:p>
-          <a:p>
-            <a:pPr indent="0" marL="0">
-              <a:buNone/>
-            </a:pPr>
-            <a:r>
-              <a:rPr lang="en-US" sz="1100" dirty="0">
+                <a:latin typeface="Calibri" pitchFamily="34" charset="0"/>
+                <a:ea typeface="Calibri" pitchFamily="34" charset="-122"/>
+                <a:cs typeface="Calibri" pitchFamily="34" charset="-120"/>
+              </a:rPr>
+              <a:t>Merge Sort : diviser, trier, fusionner → O(n log n) garanti, stable</a:t>
+            </a:r>
+            <a:endParaRPr lang="en-US" sz="1400" dirty="0"/>
+          </a:p>
+          <a:p>
+            <a:pPr marL="342900" indent="-342900">
+              <a:lnSpc>
+                <a:spcPct val="130000"/>
+              </a:lnSpc>
+              <a:buSzPct val="100000"/>
+              <a:buChar char="•"/>
+            </a:pPr>
+            <a:r>
+              <a:rPr lang="en-US" sz="1400" dirty="0">
                 <a:solidFill>
                   <a:srgbClr val="E2E8F0"/>
                 </a:solidFill>
-                <a:latin typeface="Consolas" pitchFamily="34" charset="0"/>
-                <a:ea typeface="Consolas" pitchFamily="34" charset="-122"/>
-                <a:cs typeface="Consolas" pitchFamily="34" charset="-120"/>
-              </a:rPr>
-              <a:t>        this.value = value;</a:t>
-            </a:r>
-            <a:endParaRPr lang="en-US" sz="1100" dirty="0"/>
-          </a:p>
-          <a:p>
-            <a:pPr indent="0" marL="0">
-              <a:buNone/>
-            </a:pPr>
-            <a:r>
-              <a:rPr lang="en-US" sz="1100" dirty="0">
-                <a:solidFill>
-                  <a:srgbClr val="E2E8F0"/>
-                </a:solidFill>
-                <a:latin typeface="Consolas" pitchFamily="34" charset="0"/>
-                <a:ea typeface="Consolas" pitchFamily="34" charset="-122"/>
-                <a:cs typeface="Consolas" pitchFamily="34" charset="-120"/>
-              </a:rPr>
-              <a:t>    }</a:t>
-            </a:r>
-            <a:endParaRPr lang="en-US" sz="1100" dirty="0"/>
-          </a:p>
-          <a:p>
-            <a:pPr indent="0" marL="0">
-              <a:buNone/>
-            </a:pPr>
-            <a:r>
-              <a:rPr lang="en-US" sz="1100" dirty="0">
-                <a:solidFill>
-                  <a:srgbClr val="E2E8F0"/>
-                </a:solidFill>
-                <a:latin typeface="Consolas" pitchFamily="34" charset="0"/>
-                <a:ea typeface="Consolas" pitchFamily="34" charset="-122"/>
-                <a:cs typeface="Consolas" pitchFamily="34" charset="-120"/>
-              </a:rPr>
-              <a:t>}</a:t>
-            </a:r>
-            <a:endParaRPr lang="en-US" sz="1100" dirty="0"/>
-          </a:p>
-          <a:p>
-            <a:pPr indent="0" marL="0">
-              <a:buNone/>
-            </a:pPr>
-            <a:endParaRPr lang="en-US" sz="1100" dirty="0"/>
-          </a:p>
-          <a:p>
-            <a:pPr indent="0" marL="0">
-              <a:buNone/>
-            </a:pPr>
-            <a:r>
-              <a:rPr lang="en-US" sz="1100" dirty="0">
-                <a:solidFill>
-                  <a:srgbClr val="7C3AED"/>
-                </a:solidFill>
-                <a:latin typeface="Consolas" pitchFamily="34" charset="0"/>
-                <a:ea typeface="Consolas" pitchFamily="34" charset="-122"/>
-                <a:cs typeface="Consolas" pitchFamily="34" charset="-120"/>
-              </a:rPr>
-              <a:t>class BST {</a:t>
-            </a:r>
-            <a:endParaRPr lang="en-US" sz="1100" dirty="0"/>
-          </a:p>
-          <a:p>
-            <a:pPr indent="0" marL="0">
-              <a:buNone/>
-            </a:pPr>
-            <a:r>
-              <a:rPr lang="en-US" sz="1100" dirty="0">
-                <a:solidFill>
-                  <a:srgbClr val="E2E8F0"/>
-                </a:solidFill>
-                <a:latin typeface="Consolas" pitchFamily="34" charset="0"/>
-                <a:ea typeface="Consolas" pitchFamily="34" charset="-122"/>
-                <a:cs typeface="Consolas" pitchFamily="34" charset="-120"/>
-              </a:rPr>
-              <a:t>    TreeNode root;</a:t>
-            </a:r>
-            <a:endParaRPr lang="en-US" sz="1100" dirty="0"/>
-          </a:p>
-          <a:p>
-            <a:pPr indent="0" marL="0">
-              <a:buNone/>
-            </a:pPr>
-            <a:r>
-              <a:rPr lang="en-US" sz="1100" dirty="0">
-                <a:solidFill>
-                  <a:srgbClr val="E2E8F0"/>
-                </a:solidFill>
-                <a:latin typeface="Consolas" pitchFamily="34" charset="0"/>
-                <a:ea typeface="Consolas" pitchFamily="34" charset="-122"/>
-                <a:cs typeface="Consolas" pitchFamily="34" charset="-120"/>
-              </a:rPr>
-              <a:t>    </a:t>
-            </a:r>
-            <a:endParaRPr lang="en-US" sz="1100" dirty="0"/>
-          </a:p>
-          <a:p>
-            <a:pPr indent="0" marL="0">
-              <a:buNone/>
-            </a:pPr>
-            <a:r>
-              <a:rPr lang="en-US" sz="1100" dirty="0">
-                <a:solidFill>
-                  <a:srgbClr val="64748B"/>
-                </a:solidFill>
-                <a:latin typeface="Consolas" pitchFamily="34" charset="0"/>
-                <a:ea typeface="Consolas" pitchFamily="34" charset="-122"/>
-                <a:cs typeface="Consolas" pitchFamily="34" charset="-120"/>
-              </a:rPr>
-              <a:t>    // Insertion : O(log n) en moyenne</a:t>
-            </a:r>
-            <a:endParaRPr lang="en-US" sz="1100" dirty="0"/>
-          </a:p>
-          <a:p>
-            <a:pPr indent="0" marL="0">
-              <a:buNone/>
-            </a:pPr>
-            <a:r>
-              <a:rPr lang="en-US" sz="1100" dirty="0">
-                <a:solidFill>
-                  <a:srgbClr val="E2E8F0"/>
-                </a:solidFill>
-                <a:latin typeface="Consolas" pitchFamily="34" charset="0"/>
-                <a:ea typeface="Consolas" pitchFamily="34" charset="-122"/>
-                <a:cs typeface="Consolas" pitchFamily="34" charset="-120"/>
-              </a:rPr>
-              <a:t>    void insert(int val) {</a:t>
-            </a:r>
-            <a:endParaRPr lang="en-US" sz="1100" dirty="0"/>
-          </a:p>
-          <a:p>
-            <a:pPr indent="0" marL="0">
-              <a:buNone/>
-            </a:pPr>
-            <a:r>
-              <a:rPr lang="en-US" sz="1100" dirty="0">
-                <a:solidFill>
-                  <a:srgbClr val="E2E8F0"/>
-                </a:solidFill>
-                <a:latin typeface="Consolas" pitchFamily="34" charset="0"/>
-                <a:ea typeface="Consolas" pitchFamily="34" charset="-122"/>
-                <a:cs typeface="Consolas" pitchFamily="34" charset="-120"/>
-              </a:rPr>
-              <a:t>        root = insertRec(root, val);</a:t>
-            </a:r>
-            <a:endParaRPr lang="en-US" sz="1100" dirty="0"/>
-          </a:p>
-          <a:p>
-            <a:pPr indent="0" marL="0">
-              <a:buNone/>
-            </a:pPr>
-            <a:r>
-              <a:rPr lang="en-US" sz="1100" dirty="0">
-                <a:solidFill>
-                  <a:srgbClr val="E2E8F0"/>
-                </a:solidFill>
-                <a:latin typeface="Consolas" pitchFamily="34" charset="0"/>
-                <a:ea typeface="Consolas" pitchFamily="34" charset="-122"/>
-                <a:cs typeface="Consolas" pitchFamily="34" charset="-120"/>
-              </a:rPr>
-              <a:t>    }</a:t>
-            </a:r>
-            <a:endParaRPr lang="en-US" sz="1100" dirty="0"/>
-          </a:p>
-          <a:p>
-            <a:pPr indent="0" marL="0">
-              <a:buNone/>
-            </a:pPr>
-            <a:r>
-              <a:rPr lang="en-US" sz="1100" dirty="0">
-                <a:solidFill>
-                  <a:srgbClr val="E2E8F0"/>
-                </a:solidFill>
-                <a:latin typeface="Consolas" pitchFamily="34" charset="0"/>
-                <a:ea typeface="Consolas" pitchFamily="34" charset="-122"/>
-                <a:cs typeface="Consolas" pitchFamily="34" charset="-120"/>
-              </a:rPr>
-              <a:t>    </a:t>
-            </a:r>
-            <a:endParaRPr lang="en-US" sz="1100" dirty="0"/>
-          </a:p>
-          <a:p>
-            <a:pPr indent="0" marL="0">
-              <a:buNone/>
-            </a:pPr>
-            <a:r>
-              <a:rPr lang="en-US" sz="1100" dirty="0">
-                <a:solidFill>
-                  <a:srgbClr val="E2E8F0"/>
-                </a:solidFill>
-                <a:latin typeface="Consolas" pitchFamily="34" charset="0"/>
-                <a:ea typeface="Consolas" pitchFamily="34" charset="-122"/>
-                <a:cs typeface="Consolas" pitchFamily="34" charset="-120"/>
-              </a:rPr>
-              <a:t>    TreeNode insertRec(TreeNode node, int val) {</a:t>
-            </a:r>
-            <a:endParaRPr lang="en-US" sz="1100" dirty="0"/>
-          </a:p>
-          <a:p>
-            <a:pPr indent="0" marL="0">
-              <a:buNone/>
-            </a:pPr>
-            <a:r>
-              <a:rPr lang="en-US" sz="1100" dirty="0">
-                <a:solidFill>
-                  <a:srgbClr val="E2E8F0"/>
-                </a:solidFill>
-                <a:latin typeface="Consolas" pitchFamily="34" charset="0"/>
-                <a:ea typeface="Consolas" pitchFamily="34" charset="-122"/>
-                <a:cs typeface="Consolas" pitchFamily="34" charset="-120"/>
-              </a:rPr>
-              <a:t>        if (node == null) return new TreeNode(val);</a:t>
-            </a:r>
-            <a:endParaRPr lang="en-US" sz="1100" dirty="0"/>
-          </a:p>
-          <a:p>
-            <a:pPr indent="0" marL="0">
-              <a:buNone/>
-            </a:pPr>
-            <a:r>
-              <a:rPr lang="en-US" sz="1100" dirty="0">
-                <a:solidFill>
-                  <a:srgbClr val="E2E8F0"/>
-                </a:solidFill>
-                <a:latin typeface="Consolas" pitchFamily="34" charset="0"/>
-                <a:ea typeface="Consolas" pitchFamily="34" charset="-122"/>
-                <a:cs typeface="Consolas" pitchFamily="34" charset="-120"/>
-              </a:rPr>
-              <a:t>        if (val &lt; node.value)</a:t>
-            </a:r>
-            <a:endParaRPr lang="en-US" sz="1100" dirty="0"/>
-          </a:p>
-          <a:p>
-            <a:pPr indent="0" marL="0">
-              <a:buNone/>
-            </a:pPr>
-            <a:r>
-              <a:rPr lang="en-US" sz="1100" dirty="0">
-                <a:solidFill>
-                  <a:srgbClr val="E2E8F0"/>
-                </a:solidFill>
-                <a:latin typeface="Consolas" pitchFamily="34" charset="0"/>
-                <a:ea typeface="Consolas" pitchFamily="34" charset="-122"/>
-                <a:cs typeface="Consolas" pitchFamily="34" charset="-120"/>
-              </a:rPr>
-              <a:t>            node.left = insertRec(node.left, val);</a:t>
-            </a:r>
-            <a:endParaRPr lang="en-US" sz="1100" dirty="0"/>
-          </a:p>
-          <a:p>
-            <a:pPr indent="0" marL="0">
-              <a:buNone/>
-            </a:pPr>
-            <a:r>
-              <a:rPr lang="en-US" sz="1100" dirty="0">
-                <a:solidFill>
-                  <a:srgbClr val="E2E8F0"/>
-                </a:solidFill>
-                <a:latin typeface="Consolas" pitchFamily="34" charset="0"/>
-                <a:ea typeface="Consolas" pitchFamily="34" charset="-122"/>
-                <a:cs typeface="Consolas" pitchFamily="34" charset="-120"/>
-              </a:rPr>
-              <a:t>        else if (val &gt; node.value)</a:t>
-            </a:r>
-            <a:endParaRPr lang="en-US" sz="1100" dirty="0"/>
-          </a:p>
-          <a:p>
-            <a:pPr indent="0" marL="0">
-              <a:buNone/>
-            </a:pPr>
-            <a:r>
-              <a:rPr lang="en-US" sz="1100" dirty="0">
-                <a:solidFill>
-                  <a:srgbClr val="E2E8F0"/>
-                </a:solidFill>
-                <a:latin typeface="Consolas" pitchFamily="34" charset="0"/>
-                <a:ea typeface="Consolas" pitchFamily="34" charset="-122"/>
-                <a:cs typeface="Consolas" pitchFamily="34" charset="-120"/>
-              </a:rPr>
-              <a:t>            node.right = insertRec(node.right, val);</a:t>
-            </a:r>
-            <a:endParaRPr lang="en-US" sz="1100" dirty="0"/>
-          </a:p>
-          <a:p>
-            <a:pPr indent="0" marL="0">
-              <a:buNone/>
-            </a:pPr>
-            <a:r>
-              <a:rPr lang="en-US" sz="1100" dirty="0">
-                <a:solidFill>
-                  <a:srgbClr val="E2E8F0"/>
-                </a:solidFill>
-                <a:latin typeface="Consolas" pitchFamily="34" charset="0"/>
-                <a:ea typeface="Consolas" pitchFamily="34" charset="-122"/>
-                <a:cs typeface="Consolas" pitchFamily="34" charset="-120"/>
-              </a:rPr>
-              <a:t>        return node;</a:t>
-            </a:r>
-            <a:endParaRPr lang="en-US" sz="1100" dirty="0"/>
-          </a:p>
-          <a:p>
-            <a:pPr indent="0" marL="0">
-              <a:buNone/>
-            </a:pPr>
-            <a:r>
-              <a:rPr lang="en-US" sz="1100" dirty="0">
-                <a:solidFill>
-                  <a:srgbClr val="E2E8F0"/>
-                </a:solidFill>
-                <a:latin typeface="Consolas" pitchFamily="34" charset="0"/>
-                <a:ea typeface="Consolas" pitchFamily="34" charset="-122"/>
-                <a:cs typeface="Consolas" pitchFamily="34" charset="-120"/>
-              </a:rPr>
-              <a:t>    }</a:t>
-            </a:r>
-            <a:endParaRPr lang="en-US" sz="1100" dirty="0"/>
-          </a:p>
-          <a:p>
-            <a:pPr indent="0" marL="0">
-              <a:buNone/>
-            </a:pPr>
-            <a:r>
-              <a:rPr lang="en-US" sz="1100" dirty="0">
-                <a:solidFill>
-                  <a:srgbClr val="E2E8F0"/>
-                </a:solidFill>
-                <a:latin typeface="Consolas" pitchFamily="34" charset="0"/>
-                <a:ea typeface="Consolas" pitchFamily="34" charset="-122"/>
-                <a:cs typeface="Consolas" pitchFamily="34" charset="-120"/>
-              </a:rPr>
-              <a:t>    </a:t>
-            </a:r>
-            <a:endParaRPr lang="en-US" sz="1100" dirty="0"/>
-          </a:p>
-          <a:p>
-            <a:pPr indent="0" marL="0">
-              <a:buNone/>
-            </a:pPr>
-            <a:r>
-              <a:rPr lang="en-US" sz="1100" dirty="0">
-                <a:solidFill>
-                  <a:srgbClr val="64748B"/>
-                </a:solidFill>
-                <a:latin typeface="Consolas" pitchFamily="34" charset="0"/>
-                <a:ea typeface="Consolas" pitchFamily="34" charset="-122"/>
-                <a:cs typeface="Consolas" pitchFamily="34" charset="-120"/>
-              </a:rPr>
-              <a:t>    // Parcours inorder : donne les éléments triés !</a:t>
-            </a:r>
-            <a:endParaRPr lang="en-US" sz="1100" dirty="0"/>
-          </a:p>
-          <a:p>
-            <a:pPr indent="0" marL="0">
-              <a:buNone/>
-            </a:pPr>
-            <a:r>
-              <a:rPr lang="en-US" sz="1100" dirty="0">
-                <a:solidFill>
-                  <a:srgbClr val="E2E8F0"/>
-                </a:solidFill>
-                <a:latin typeface="Consolas" pitchFamily="34" charset="0"/>
-                <a:ea typeface="Consolas" pitchFamily="34" charset="-122"/>
-                <a:cs typeface="Consolas" pitchFamily="34" charset="-120"/>
-              </a:rPr>
-              <a:t>    void inorder(TreeNode node) {</a:t>
-            </a:r>
-            <a:endParaRPr lang="en-US" sz="1100" dirty="0"/>
-          </a:p>
-          <a:p>
-            <a:pPr indent="0" marL="0">
-              <a:buNone/>
-            </a:pPr>
-            <a:r>
-              <a:rPr lang="en-US" sz="1100" dirty="0">
-                <a:solidFill>
-                  <a:srgbClr val="E2E8F0"/>
-                </a:solidFill>
-                <a:latin typeface="Consolas" pitchFamily="34" charset="0"/>
-                <a:ea typeface="Consolas" pitchFamily="34" charset="-122"/>
-                <a:cs typeface="Consolas" pitchFamily="34" charset="-120"/>
-              </a:rPr>
-              <a:t>        if (node == null) return;</a:t>
-            </a:r>
-            <a:endParaRPr lang="en-US" sz="1100" dirty="0"/>
-          </a:p>
-          <a:p>
-            <a:pPr indent="0" marL="0">
-              <a:buNone/>
-            </a:pPr>
-            <a:r>
-              <a:rPr lang="en-US" sz="1100" dirty="0">
-                <a:solidFill>
-                  <a:srgbClr val="E2E8F0"/>
-                </a:solidFill>
-                <a:latin typeface="Consolas" pitchFamily="34" charset="0"/>
-                <a:ea typeface="Consolas" pitchFamily="34" charset="-122"/>
-                <a:cs typeface="Consolas" pitchFamily="34" charset="-120"/>
-              </a:rPr>
-              <a:t>        inorder(node.left);        // Gauche</a:t>
-            </a:r>
-            <a:endParaRPr lang="en-US" sz="1100" dirty="0"/>
-          </a:p>
-          <a:p>
-            <a:pPr indent="0" marL="0">
-              <a:buNone/>
-            </a:pPr>
-            <a:r>
-              <a:rPr lang="en-US" sz="1100" dirty="0">
-                <a:solidFill>
-                  <a:srgbClr val="E2E8F0"/>
-                </a:solidFill>
-                <a:latin typeface="Consolas" pitchFamily="34" charset="0"/>
-                <a:ea typeface="Consolas" pitchFamily="34" charset="-122"/>
-                <a:cs typeface="Consolas" pitchFamily="34" charset="-120"/>
-              </a:rPr>
-              <a:t>        System.out.print(node.value + " "); // Racine</a:t>
-            </a:r>
-            <a:endParaRPr lang="en-US" sz="1100" dirty="0"/>
-          </a:p>
-          <a:p>
-            <a:pPr indent="0" marL="0">
-              <a:buNone/>
-            </a:pPr>
-            <a:r>
-              <a:rPr lang="en-US" sz="1100" dirty="0">
-                <a:solidFill>
-                  <a:srgbClr val="E2E8F0"/>
-                </a:solidFill>
-                <a:latin typeface="Consolas" pitchFamily="34" charset="0"/>
-                <a:ea typeface="Consolas" pitchFamily="34" charset="-122"/>
-                <a:cs typeface="Consolas" pitchFamily="34" charset="-120"/>
-              </a:rPr>
-              <a:t>        inorder(node.right);       // Droite</a:t>
-            </a:r>
-            <a:endParaRPr lang="en-US" sz="1100" dirty="0"/>
-          </a:p>
-          <a:p>
-            <a:pPr indent="0" marL="0">
-              <a:buNone/>
-            </a:pPr>
-            <a:r>
-              <a:rPr lang="en-US" sz="1100" dirty="0">
-                <a:solidFill>
-                  <a:srgbClr val="E2E8F0"/>
-                </a:solidFill>
-                <a:latin typeface="Consolas" pitchFamily="34" charset="0"/>
-                <a:ea typeface="Consolas" pitchFamily="34" charset="-122"/>
-                <a:cs typeface="Consolas" pitchFamily="34" charset="-120"/>
-              </a:rPr>
-              <a:t>    }</a:t>
-            </a:r>
-            <a:endParaRPr lang="en-US" sz="1100" dirty="0"/>
-          </a:p>
-          <a:p>
-            <a:pPr indent="0" marL="0">
-              <a:buNone/>
-            </a:pPr>
-            <a:r>
-              <a:rPr lang="en-US" sz="1100" dirty="0">
-                <a:solidFill>
-                  <a:srgbClr val="E2E8F0"/>
-                </a:solidFill>
-                <a:latin typeface="Consolas" pitchFamily="34" charset="0"/>
-                <a:ea typeface="Consolas" pitchFamily="34" charset="-122"/>
-                <a:cs typeface="Consolas" pitchFamily="34" charset="-120"/>
-              </a:rPr>
-              <a:t>}</a:t>
-            </a:r>
-            <a:endParaRPr lang="en-US" sz="1100" dirty="0"/>
+                <a:latin typeface="Calibri" pitchFamily="34" charset="0"/>
+                <a:ea typeface="Calibri" pitchFamily="34" charset="-122"/>
+                <a:cs typeface="Calibri" pitchFamily="34" charset="-120"/>
+              </a:rPr>
+              <a:t>Tri optimal par comparaison = O(n log n)</a:t>
+            </a:r>
+            <a:endParaRPr lang="en-US" sz="1400" dirty="0"/>
           </a:p>
         </p:txBody>
       </p:sp>
@@ -2528,7 +2104,7 @@
     <p:bg>
       <p:bgPr>
         <a:solidFill>
-          <a:srgbClr val="F8FAFC"/>
+          <a:srgbClr val="1A0D00"/>
         </a:solidFill>
       </p:bgPr>
     </p:bg>
@@ -2555,13 +2131,13 @@
         <p:spPr>
           <a:xfrm>
             <a:off x="0" y="0"/>
-            <a:ext cx="109728" cy="5143500"/>
+            <a:ext cx="9144000" cy="54864"/>
           </a:xfrm>
           <a:prstGeom prst="rect">
             <a:avLst/>
           </a:prstGeom>
           <a:solidFill>
-            <a:srgbClr val="DC2626"/>
+            <a:srgbClr val="F97316"/>
           </a:solidFill>
           <a:ln/>
         </p:spPr>
@@ -2574,8 +2150,8 @@
         </p:nvSpPr>
         <p:spPr>
           <a:xfrm>
-            <a:off x="457200" y="274320"/>
-            <a:ext cx="8229600" cy="457200"/>
+            <a:off x="548640" y="274320"/>
+            <a:ext cx="8229600" cy="548640"/>
           </a:xfrm>
           <a:prstGeom prst="rect">
             <a:avLst/>
@@ -2591,50 +2167,30 @@
               <a:buNone/>
             </a:pPr>
             <a:r>
-              <a:rPr lang="en-US" sz="2600" b="1" dirty="0">
-                <a:solidFill>
-                  <a:srgbClr val="1B2A4A"/>
-                </a:solidFill>
-                <a:latin typeface="Trebuchet MS" pitchFamily="34" charset="0"/>
-                <a:ea typeface="Trebuchet MS" pitchFamily="34" charset="-122"/>
-                <a:cs typeface="Trebuchet MS" pitchFamily="34" charset="-120"/>
-              </a:rPr>
-              <a:t>Tri par insertion (Insertion Sort)</a:t>
-            </a:r>
-            <a:endParaRPr lang="en-US" sz="2600" dirty="0"/>
-          </a:p>
-        </p:txBody>
-      </p:sp>
-      <p:sp>
-        <p:nvSpPr>
-          <p:cNvPr id="4" name="Shape 2"/>
+              <a:rPr lang="en-US" sz="2400" b="1" dirty="0">
+                <a:solidFill>
+                  <a:srgbClr val="FFFFFF"/>
+                </a:solidFill>
+                <a:latin typeface="Calibri" pitchFamily="34" charset="0"/>
+                <a:ea typeface="Calibri" pitchFamily="34" charset="-122"/>
+                <a:cs typeface="Calibri" pitchFamily="34" charset="-120"/>
+              </a:rPr>
+              <a:t>Comparaison des algorithmes de tri</a:t>
+            </a:r>
+            <a:endParaRPr lang="en-US" sz="2400" dirty="0"/>
+          </a:p>
+        </p:txBody>
+      </p:sp>
+      <p:sp>
+        <p:nvSpPr>
+          <p:cNvPr id="4" name="Text 2"/>
           <p:cNvSpPr/>
           <p:nvPr/>
         </p:nvSpPr>
         <p:spPr>
           <a:xfrm>
-            <a:off x="457200" y="822960"/>
-            <a:ext cx="8229600" cy="3840480"/>
-          </a:xfrm>
-          <a:prstGeom prst="rect">
-            <a:avLst/>
-          </a:prstGeom>
-          <a:solidFill>
-            <a:srgbClr val="1E293B"/>
-          </a:solidFill>
-          <a:ln/>
-        </p:spPr>
-      </p:sp>
-      <p:sp>
-        <p:nvSpPr>
-          <p:cNvPr id="5" name="Text 3"/>
-          <p:cNvSpPr/>
-          <p:nvPr/>
-        </p:nvSpPr>
-        <p:spPr>
-          <a:xfrm>
-            <a:off x="640080" y="914400"/>
-            <a:ext cx="7863840" cy="3657600"/>
+            <a:off x="548640" y="1005840"/>
+            <a:ext cx="8046720" cy="3657600"/>
           </a:xfrm>
           <a:prstGeom prst="rect">
             <a:avLst/>
@@ -2643,376 +2199,112 @@
           <a:ln/>
         </p:spPr>
         <p:txBody>
-          <a:bodyPr wrap="square" rtlCol="0" anchor="ctr"/>
-          <a:lstStyle/>
-          <a:p>
-            <a:pPr indent="0" marL="0">
-              <a:buNone/>
-            </a:pPr>
-            <a:r>
-              <a:rPr lang="en-US" sz="1100" dirty="0">
-                <a:solidFill>
-                  <a:srgbClr val="64748B"/>
-                </a:solidFill>
-                <a:latin typeface="Consolas" pitchFamily="34" charset="0"/>
-                <a:ea typeface="Consolas" pitchFamily="34" charset="-122"/>
-                <a:cs typeface="Consolas" pitchFamily="34" charset="-120"/>
-              </a:rPr>
-              <a:t>// Principe : insérer chaque élément à sa place</a:t>
-            </a:r>
-            <a:endParaRPr lang="en-US" sz="1100" dirty="0"/>
-          </a:p>
-          <a:p>
-            <a:pPr indent="0" marL="0">
-              <a:buNone/>
-            </a:pPr>
-            <a:r>
-              <a:rPr lang="en-US" sz="1100" dirty="0">
-                <a:solidFill>
-                  <a:srgbClr val="64748B"/>
-                </a:solidFill>
-                <a:latin typeface="Consolas" pitchFamily="34" charset="0"/>
-                <a:ea typeface="Consolas" pitchFamily="34" charset="-122"/>
-                <a:cs typeface="Consolas" pitchFamily="34" charset="-120"/>
-              </a:rPr>
-              <a:t>// dans la partie déjà triée du tableau</a:t>
-            </a:r>
-            <a:endParaRPr lang="en-US" sz="1100" dirty="0"/>
-          </a:p>
-          <a:p>
-            <a:pPr indent="0" marL="0">
-              <a:buNone/>
-            </a:pPr>
-            <a:endParaRPr lang="en-US" sz="1100" dirty="0"/>
-          </a:p>
-          <a:p>
-            <a:pPr indent="0" marL="0">
-              <a:buNone/>
-            </a:pPr>
-            <a:r>
-              <a:rPr lang="en-US" sz="1100" dirty="0">
+          <a:bodyPr wrap="square" rtlCol="0" anchor="t"/>
+          <a:lstStyle/>
+          <a:p>
+            <a:pPr marL="342900" indent="-342900">
+              <a:lnSpc>
+                <a:spcPct val="130000"/>
+              </a:lnSpc>
+              <a:buSzPct val="100000"/>
+              <a:buChar char="•"/>
+            </a:pPr>
+            <a:r>
+              <a:rPr lang="en-US" sz="1400" dirty="0">
                 <a:solidFill>
                   <a:srgbClr val="E2E8F0"/>
                 </a:solidFill>
-                <a:latin typeface="Consolas" pitchFamily="34" charset="0"/>
-                <a:ea typeface="Consolas" pitchFamily="34" charset="-122"/>
-                <a:cs typeface="Consolas" pitchFamily="34" charset="-120"/>
-              </a:rPr>
-              <a:t>void insertionSort(int[] arr) {</a:t>
-            </a:r>
-            <a:endParaRPr lang="en-US" sz="1100" dirty="0"/>
-          </a:p>
-          <a:p>
-            <a:pPr indent="0" marL="0">
-              <a:buNone/>
-            </a:pPr>
-            <a:r>
-              <a:rPr lang="en-US" sz="1100" dirty="0">
+                <a:latin typeface="Calibri" pitchFamily="34" charset="0"/>
+                <a:ea typeface="Calibri" pitchFamily="34" charset="-122"/>
+                <a:cs typeface="Calibri" pitchFamily="34" charset="-120"/>
+              </a:rPr>
+              <a:t>Bubble Sort : simple mais O(n²) — pédagogique seulement</a:t>
+            </a:r>
+            <a:endParaRPr lang="en-US" sz="1400" dirty="0"/>
+          </a:p>
+          <a:p>
+            <a:pPr marL="342900" indent="-342900">
+              <a:lnSpc>
+                <a:spcPct val="130000"/>
+              </a:lnSpc>
+              <a:buSzPct val="100000"/>
+              <a:buChar char="•"/>
+            </a:pPr>
+            <a:r>
+              <a:rPr lang="en-US" sz="1400" dirty="0">
                 <a:solidFill>
                   <a:srgbClr val="E2E8F0"/>
                 </a:solidFill>
-                <a:latin typeface="Consolas" pitchFamily="34" charset="0"/>
-                <a:ea typeface="Consolas" pitchFamily="34" charset="-122"/>
-                <a:cs typeface="Consolas" pitchFamily="34" charset="-120"/>
-              </a:rPr>
-              <a:t>    for (int i = 1; i &lt; arr.length; i++) {</a:t>
-            </a:r>
-            <a:endParaRPr lang="en-US" sz="1100" dirty="0"/>
-          </a:p>
-          <a:p>
-            <a:pPr indent="0" marL="0">
-              <a:buNone/>
-            </a:pPr>
-            <a:r>
-              <a:rPr lang="en-US" sz="1100" dirty="0">
+                <a:latin typeface="Calibri" pitchFamily="34" charset="0"/>
+                <a:ea typeface="Calibri" pitchFamily="34" charset="-122"/>
+                <a:cs typeface="Calibri" pitchFamily="34" charset="-120"/>
+              </a:rPr>
+              <a:t>Quick Sort : très rapide en pratique, in-place, instable</a:t>
+            </a:r>
+            <a:endParaRPr lang="en-US" sz="1400" dirty="0"/>
+          </a:p>
+          <a:p>
+            <a:pPr marL="342900" indent="-342900">
+              <a:lnSpc>
+                <a:spcPct val="130000"/>
+              </a:lnSpc>
+              <a:buSzPct val="100000"/>
+              <a:buChar char="•"/>
+            </a:pPr>
+            <a:r>
+              <a:rPr lang="en-US" sz="1400" dirty="0">
                 <a:solidFill>
                   <a:srgbClr val="E2E8F0"/>
                 </a:solidFill>
-                <a:latin typeface="Consolas" pitchFamily="34" charset="0"/>
-                <a:ea typeface="Consolas" pitchFamily="34" charset="-122"/>
-                <a:cs typeface="Consolas" pitchFamily="34" charset="-120"/>
-              </a:rPr>
-              <a:t>        int key = arr[i];  // élément à insérer</a:t>
-            </a:r>
-            <a:endParaRPr lang="en-US" sz="1100" dirty="0"/>
-          </a:p>
-          <a:p>
-            <a:pPr indent="0" marL="0">
-              <a:buNone/>
-            </a:pPr>
-            <a:r>
-              <a:rPr lang="en-US" sz="1100" dirty="0">
+                <a:latin typeface="Calibri" pitchFamily="34" charset="0"/>
+                <a:ea typeface="Calibri" pitchFamily="34" charset="-122"/>
+                <a:cs typeface="Calibri" pitchFamily="34" charset="-120"/>
+              </a:rPr>
+              <a:t>Merge Sort : O(n log n) garanti, stable, mais O(n) espace</a:t>
+            </a:r>
+            <a:endParaRPr lang="en-US" sz="1400" dirty="0"/>
+          </a:p>
+          <a:p>
+            <a:pPr marL="342900" indent="-342900">
+              <a:lnSpc>
+                <a:spcPct val="130000"/>
+              </a:lnSpc>
+              <a:buSzPct val="100000"/>
+              <a:buChar char="•"/>
+            </a:pPr>
+            <a:r>
+              <a:rPr lang="en-US" sz="1400" dirty="0">
                 <a:solidFill>
                   <a:srgbClr val="E2E8F0"/>
                 </a:solidFill>
-                <a:latin typeface="Consolas" pitchFamily="34" charset="0"/>
-                <a:ea typeface="Consolas" pitchFamily="34" charset="-122"/>
-                <a:cs typeface="Consolas" pitchFamily="34" charset="-120"/>
-              </a:rPr>
-              <a:t>        int j = i - 1;</a:t>
-            </a:r>
-            <a:endParaRPr lang="en-US" sz="1100" dirty="0"/>
-          </a:p>
-          <a:p>
-            <a:pPr indent="0" marL="0">
-              <a:buNone/>
-            </a:pPr>
-            <a:r>
-              <a:rPr lang="en-US" sz="1100" dirty="0">
+                <a:latin typeface="Calibri" pitchFamily="34" charset="0"/>
+                <a:ea typeface="Calibri" pitchFamily="34" charset="-122"/>
+                <a:cs typeface="Calibri" pitchFamily="34" charset="-120"/>
+              </a:rPr>
+              <a:t>Insertion Sort : excellent pour petits tableaux et données presque triées</a:t>
+            </a:r>
+            <a:endParaRPr lang="en-US" sz="1400" dirty="0"/>
+          </a:p>
+          <a:p>
+            <a:pPr marL="342900" indent="-342900">
+              <a:lnSpc>
+                <a:spcPct val="130000"/>
+              </a:lnSpc>
+              <a:buSzPct val="100000"/>
+              <a:buChar char="•"/>
+            </a:pPr>
+            <a:r>
+              <a:rPr lang="en-US" sz="1400" dirty="0">
                 <a:solidFill>
                   <a:srgbClr val="E2E8F0"/>
                 </a:solidFill>
-                <a:latin typeface="Consolas" pitchFamily="34" charset="0"/>
-                <a:ea typeface="Consolas" pitchFamily="34" charset="-122"/>
-                <a:cs typeface="Consolas" pitchFamily="34" charset="-120"/>
-              </a:rPr>
-              <a:t>        </a:t>
-            </a:r>
-            <a:endParaRPr lang="en-US" sz="1100" dirty="0"/>
-          </a:p>
-          <a:p>
-            <a:pPr indent="0" marL="0">
-              <a:buNone/>
-            </a:pPr>
-            <a:r>
-              <a:rPr lang="en-US" sz="1100" dirty="0">
-                <a:solidFill>
-                  <a:srgbClr val="64748B"/>
-                </a:solidFill>
-                <a:latin typeface="Consolas" pitchFamily="34" charset="0"/>
-                <a:ea typeface="Consolas" pitchFamily="34" charset="-122"/>
-                <a:cs typeface="Consolas" pitchFamily="34" charset="-120"/>
-              </a:rPr>
-              <a:t>        // Décaler les éléments plus grands</a:t>
-            </a:r>
-            <a:endParaRPr lang="en-US" sz="1100" dirty="0"/>
-          </a:p>
-          <a:p>
-            <a:pPr indent="0" marL="0">
-              <a:buNone/>
-            </a:pPr>
-            <a:r>
-              <a:rPr lang="en-US" sz="1100" dirty="0">
-                <a:solidFill>
-                  <a:srgbClr val="E2E8F0"/>
-                </a:solidFill>
-                <a:latin typeface="Consolas" pitchFamily="34" charset="0"/>
-                <a:ea typeface="Consolas" pitchFamily="34" charset="-122"/>
-                <a:cs typeface="Consolas" pitchFamily="34" charset="-120"/>
-              </a:rPr>
-              <a:t>        while (j &gt;= 0 &amp;&amp; arr[j] &gt; key) {</a:t>
-            </a:r>
-            <a:endParaRPr lang="en-US" sz="1100" dirty="0"/>
-          </a:p>
-          <a:p>
-            <a:pPr indent="0" marL="0">
-              <a:buNone/>
-            </a:pPr>
-            <a:r>
-              <a:rPr lang="en-US" sz="1100" dirty="0">
-                <a:solidFill>
-                  <a:srgbClr val="E2E8F0"/>
-                </a:solidFill>
-                <a:latin typeface="Consolas" pitchFamily="34" charset="0"/>
-                <a:ea typeface="Consolas" pitchFamily="34" charset="-122"/>
-                <a:cs typeface="Consolas" pitchFamily="34" charset="-120"/>
-              </a:rPr>
-              <a:t>            arr[j + 1] = arr[j];</a:t>
-            </a:r>
-            <a:endParaRPr lang="en-US" sz="1100" dirty="0"/>
-          </a:p>
-          <a:p>
-            <a:pPr indent="0" marL="0">
-              <a:buNone/>
-            </a:pPr>
-            <a:r>
-              <a:rPr lang="en-US" sz="1100" dirty="0">
-                <a:solidFill>
-                  <a:srgbClr val="E2E8F0"/>
-                </a:solidFill>
-                <a:latin typeface="Consolas" pitchFamily="34" charset="0"/>
-                <a:ea typeface="Consolas" pitchFamily="34" charset="-122"/>
-                <a:cs typeface="Consolas" pitchFamily="34" charset="-120"/>
-              </a:rPr>
-              <a:t>            j--;</a:t>
-            </a:r>
-            <a:endParaRPr lang="en-US" sz="1100" dirty="0"/>
-          </a:p>
-          <a:p>
-            <a:pPr indent="0" marL="0">
-              <a:buNone/>
-            </a:pPr>
-            <a:r>
-              <a:rPr lang="en-US" sz="1100" dirty="0">
-                <a:solidFill>
-                  <a:srgbClr val="E2E8F0"/>
-                </a:solidFill>
-                <a:latin typeface="Consolas" pitchFamily="34" charset="0"/>
-                <a:ea typeface="Consolas" pitchFamily="34" charset="-122"/>
-                <a:cs typeface="Consolas" pitchFamily="34" charset="-120"/>
-              </a:rPr>
-              <a:t>        }</a:t>
-            </a:r>
-            <a:endParaRPr lang="en-US" sz="1100" dirty="0"/>
-          </a:p>
-          <a:p>
-            <a:pPr indent="0" marL="0">
-              <a:buNone/>
-            </a:pPr>
-            <a:r>
-              <a:rPr lang="en-US" sz="1100" dirty="0">
-                <a:solidFill>
-                  <a:srgbClr val="E2E8F0"/>
-                </a:solidFill>
-                <a:latin typeface="Consolas" pitchFamily="34" charset="0"/>
-                <a:ea typeface="Consolas" pitchFamily="34" charset="-122"/>
-                <a:cs typeface="Consolas" pitchFamily="34" charset="-120"/>
-              </a:rPr>
-              <a:t>        arr[j + 1] = key;  // insérer à la bonne place</a:t>
-            </a:r>
-            <a:endParaRPr lang="en-US" sz="1100" dirty="0"/>
-          </a:p>
-          <a:p>
-            <a:pPr indent="0" marL="0">
-              <a:buNone/>
-            </a:pPr>
-            <a:r>
-              <a:rPr lang="en-US" sz="1100" dirty="0">
-                <a:solidFill>
-                  <a:srgbClr val="E2E8F0"/>
-                </a:solidFill>
-                <a:latin typeface="Consolas" pitchFamily="34" charset="0"/>
-                <a:ea typeface="Consolas" pitchFamily="34" charset="-122"/>
-                <a:cs typeface="Consolas" pitchFamily="34" charset="-120"/>
-              </a:rPr>
-              <a:t>    }</a:t>
-            </a:r>
-            <a:endParaRPr lang="en-US" sz="1100" dirty="0"/>
-          </a:p>
-          <a:p>
-            <a:pPr indent="0" marL="0">
-              <a:buNone/>
-            </a:pPr>
-            <a:r>
-              <a:rPr lang="en-US" sz="1100" dirty="0">
-                <a:solidFill>
-                  <a:srgbClr val="E2E8F0"/>
-                </a:solidFill>
-                <a:latin typeface="Consolas" pitchFamily="34" charset="0"/>
-                <a:ea typeface="Consolas" pitchFamily="34" charset="-122"/>
-                <a:cs typeface="Consolas" pitchFamily="34" charset="-120"/>
-              </a:rPr>
-              <a:t>}</a:t>
-            </a:r>
-            <a:endParaRPr lang="en-US" sz="1100" dirty="0"/>
-          </a:p>
-          <a:p>
-            <a:pPr indent="0" marL="0">
-              <a:buNone/>
-            </a:pPr>
-            <a:endParaRPr lang="en-US" sz="1100" dirty="0"/>
-          </a:p>
-          <a:p>
-            <a:pPr indent="0" marL="0">
-              <a:buNone/>
-            </a:pPr>
-            <a:r>
-              <a:rPr lang="en-US" sz="1100" dirty="0">
-                <a:solidFill>
-                  <a:srgbClr val="64748B"/>
-                </a:solidFill>
-                <a:latin typeface="Consolas" pitchFamily="34" charset="0"/>
-                <a:ea typeface="Consolas" pitchFamily="34" charset="-122"/>
-                <a:cs typeface="Consolas" pitchFamily="34" charset="-120"/>
-              </a:rPr>
-              <a:t>// Complexité :</a:t>
-            </a:r>
-            <a:endParaRPr lang="en-US" sz="1100" dirty="0"/>
-          </a:p>
-          <a:p>
-            <a:pPr indent="0" marL="0">
-              <a:buNone/>
-            </a:pPr>
-            <a:r>
-              <a:rPr lang="en-US" sz="1100" dirty="0">
-                <a:solidFill>
-                  <a:srgbClr val="64748B"/>
-                </a:solidFill>
-                <a:latin typeface="Consolas" pitchFamily="34" charset="0"/>
-                <a:ea typeface="Consolas" pitchFamily="34" charset="-122"/>
-                <a:cs typeface="Consolas" pitchFamily="34" charset="-120"/>
-              </a:rPr>
-              <a:t>// Meilleur cas : O(n) — déjà trié</a:t>
-            </a:r>
-            <a:endParaRPr lang="en-US" sz="1100" dirty="0"/>
-          </a:p>
-          <a:p>
-            <a:pPr indent="0" marL="0">
-              <a:buNone/>
-            </a:pPr>
-            <a:r>
-              <a:rPr lang="en-US" sz="1100" dirty="0">
-                <a:solidFill>
-                  <a:srgbClr val="64748B"/>
-                </a:solidFill>
-                <a:latin typeface="Consolas" pitchFamily="34" charset="0"/>
-                <a:ea typeface="Consolas" pitchFamily="34" charset="-122"/>
-                <a:cs typeface="Consolas" pitchFamily="34" charset="-120"/>
-              </a:rPr>
-              <a:t>// Pire cas     : O(n²) — trié à l'envers</a:t>
-            </a:r>
-            <a:endParaRPr lang="en-US" sz="1100" dirty="0"/>
-          </a:p>
-          <a:p>
-            <a:pPr indent="0" marL="0">
-              <a:buNone/>
-            </a:pPr>
-            <a:r>
-              <a:rPr lang="en-US" sz="1100" dirty="0">
-                <a:solidFill>
-                  <a:srgbClr val="64748B"/>
-                </a:solidFill>
-                <a:latin typeface="Consolas" pitchFamily="34" charset="0"/>
-                <a:ea typeface="Consolas" pitchFamily="34" charset="-122"/>
-                <a:cs typeface="Consolas" pitchFamily="34" charset="-120"/>
-              </a:rPr>
-              <a:t>// Stable       : OUI</a:t>
-            </a:r>
-            <a:endParaRPr lang="en-US" sz="1100" dirty="0"/>
-          </a:p>
-          <a:p>
-            <a:pPr indent="0" marL="0">
-              <a:buNone/>
-            </a:pPr>
-            <a:r>
-              <a:rPr lang="en-US" sz="1100" dirty="0">
-                <a:solidFill>
-                  <a:srgbClr val="64748B"/>
-                </a:solidFill>
-                <a:latin typeface="Consolas" pitchFamily="34" charset="0"/>
-                <a:ea typeface="Consolas" pitchFamily="34" charset="-122"/>
-                <a:cs typeface="Consolas" pitchFamily="34" charset="-120"/>
-              </a:rPr>
-              <a:t>// Mémoire      : O(1) — tri en place</a:t>
-            </a:r>
-            <a:endParaRPr lang="en-US" sz="1100" dirty="0"/>
-          </a:p>
-          <a:p>
-            <a:pPr indent="0" marL="0">
-              <a:buNone/>
-            </a:pPr>
-            <a:r>
-              <a:rPr lang="en-US" sz="1100" dirty="0">
-                <a:solidFill>
-                  <a:srgbClr val="64748B"/>
-                </a:solidFill>
-                <a:latin typeface="Consolas" pitchFamily="34" charset="0"/>
-                <a:ea typeface="Consolas" pitchFamily="34" charset="-122"/>
-                <a:cs typeface="Consolas" pitchFamily="34" charset="-120"/>
-              </a:rPr>
-              <a:t>// Bon pour     : petits tableaux ou presque triés</a:t>
-            </a:r>
-            <a:endParaRPr lang="en-US" sz="1100" dirty="0"/>
+                <a:latin typeface="Calibri" pitchFamily="34" charset="0"/>
+                <a:ea typeface="Calibri" pitchFamily="34" charset="-122"/>
+                <a:cs typeface="Calibri" pitchFamily="34" charset="-120"/>
+              </a:rPr>
+              <a:t>Java Arrays.sort() utilise TimSort (Merge + Insertion)</a:t>
+            </a:r>
+            <a:endParaRPr lang="en-US" sz="1400" dirty="0"/>
           </a:p>
         </p:txBody>
       </p:sp>
@@ -3030,7 +2322,7 @@
     <p:bg>
       <p:bgPr>
         <a:solidFill>
-          <a:srgbClr val="0F172A"/>
+          <a:srgbClr val="1A0D00"/>
         </a:solidFill>
       </p:bgPr>
     </p:bg>
@@ -3050,62 +2342,64 @@
       </p:grpSpPr>
       <p:sp>
         <p:nvSpPr>
-          <p:cNvPr id="2" name="Shape 0"/>
+          <p:cNvPr id="2" name="Text 0"/>
           <p:cNvSpPr/>
           <p:nvPr/>
         </p:nvSpPr>
         <p:spPr>
           <a:xfrm>
-            <a:off x="0" y="0"/>
-            <a:ext cx="9144000" cy="73152"/>
-          </a:xfrm>
-          <a:prstGeom prst="rect">
-            <a:avLst/>
+            <a:off x="548640" y="274320"/>
+            <a:ext cx="8229600" cy="548640"/>
+          </a:xfrm>
+          <a:prstGeom prst="rect">
+            <a:avLst/>
+          </a:prstGeom>
+          <a:noFill/>
+          <a:ln/>
+        </p:spPr>
+        <p:txBody>
+          <a:bodyPr wrap="square" rtlCol="0" anchor="ctr"/>
+          <a:lstStyle/>
+          <a:p>
+            <a:pPr indent="0" marL="0">
+              <a:buNone/>
+            </a:pPr>
+            <a:r>
+              <a:rPr lang="en-US" sz="2800" b="1" dirty="0">
+                <a:solidFill>
+                  <a:srgbClr val="FFFFFF"/>
+                </a:solidFill>
+                <a:latin typeface="Calibri" pitchFamily="34" charset="0"/>
+                <a:ea typeface="Calibri" pitchFamily="34" charset="-122"/>
+                <a:cs typeface="Calibri" pitchFamily="34" charset="-120"/>
+              </a:rPr>
+              <a:t>Récapitulatif</a:t>
+            </a:r>
+            <a:endParaRPr lang="en-US" sz="2800" dirty="0"/>
+          </a:p>
+        </p:txBody>
+      </p:sp>
+      <p:sp>
+        <p:nvSpPr>
+          <p:cNvPr id="3" name="Shape 1"/>
+          <p:cNvSpPr/>
+          <p:nvPr/>
+        </p:nvSpPr>
+        <p:spPr>
+          <a:xfrm>
+            <a:off x="548640" y="1097280"/>
+            <a:ext cx="2621280" cy="3200400"/>
+          </a:xfrm>
+          <a:prstGeom prst="roundRect">
+            <a:avLst>
+              <a:gd name="adj" fmla="val 3488"/>
+            </a:avLst>
           </a:prstGeom>
           <a:solidFill>
-            <a:srgbClr val="DC2626"/>
+            <a:srgbClr val="2D1A00"/>
           </a:solidFill>
           <a:ln/>
         </p:spPr>
-      </p:sp>
-      <p:sp>
-        <p:nvSpPr>
-          <p:cNvPr id="3" name="Text 1"/>
-          <p:cNvSpPr/>
-          <p:nvPr/>
-        </p:nvSpPr>
-        <p:spPr>
-          <a:xfrm>
-            <a:off x="457200" y="182880"/>
-            <a:ext cx="7315200" cy="457200"/>
-          </a:xfrm>
-          <a:prstGeom prst="rect">
-            <a:avLst/>
-          </a:prstGeom>
-          <a:noFill/>
-          <a:ln/>
-        </p:spPr>
-        <p:txBody>
-          <a:bodyPr wrap="square" rtlCol="0" anchor="ctr"/>
-          <a:lstStyle/>
-          <a:p>
-            <a:pPr indent="0" marL="0">
-              <a:buNone/>
-            </a:pPr>
-            <a:r>
-              <a:rPr lang="en-US" sz="2200" b="1" dirty="0">
-                <a:solidFill>
-                  <a:srgbClr val="DC2626"/>
-                </a:solidFill>
-                <a:latin typeface="Trebuchet MS" pitchFamily="34" charset="0"/>
-                <a:ea typeface="Trebuchet MS" pitchFamily="34" charset="-122"/>
-                <a:cs typeface="Trebuchet MS" pitchFamily="34" charset="-120"/>
-              </a:rPr>
-              <a:t>NOTES ENSEIGNANT — Ch.9 P4b Tree+Sorting</a:t>
-            </a:r>
-            <a:endParaRPr lang="en-US" sz="2200" dirty="0"/>
-          </a:p>
-        </p:txBody>
       </p:sp>
       <p:sp>
         <p:nvSpPr>
@@ -3115,8 +2409,8 @@
         </p:nvSpPr>
         <p:spPr>
           <a:xfrm>
-            <a:off x="457200" y="731520"/>
-            <a:ext cx="8229600" cy="4114800"/>
+            <a:off x="548640" y="1280160"/>
+            <a:ext cx="2621280" cy="457200"/>
           </a:xfrm>
           <a:prstGeom prst="rect">
             <a:avLst/>
@@ -3128,112 +2422,319 @@
           <a:bodyPr wrap="square" rtlCol="0" anchor="ctr"/>
           <a:lstStyle/>
           <a:p>
-            <a:pPr indent="0" marL="0">
+            <a:pPr algn="ctr" indent="0" marL="0">
               <a:buNone/>
             </a:pPr>
             <a:r>
-              <a:rPr lang="en-US" sz="1500" b="1" dirty="0">
-                <a:solidFill>
-                  <a:srgbClr val="00A896"/>
-                </a:solidFill>
-                <a:latin typeface="Trebuchet MS" pitchFamily="34" charset="0"/>
-                <a:ea typeface="Trebuchet MS" pitchFamily="34" charset="-122"/>
-                <a:cs typeface="Trebuchet MS" pitchFamily="34" charset="-120"/>
-              </a:rPr>
-              <a:t>Plan de séance :</a:t>
-            </a:r>
-            <a:endParaRPr lang="en-US" sz="1500" dirty="0"/>
-          </a:p>
-          <a:p>
-            <a:pPr indent="0" marL="0">
+              <a:rPr lang="en-US" sz="2800" dirty="0">
+                <a:solidFill>
+                  <a:srgbClr val="000000"/>
+                </a:solidFill>
+              </a:rPr>
+              <a:t>🌳</a:t>
+            </a:r>
+            <a:endParaRPr lang="en-US" sz="2800" dirty="0"/>
+          </a:p>
+        </p:txBody>
+      </p:sp>
+      <p:sp>
+        <p:nvSpPr>
+          <p:cNvPr id="5" name="Text 3"/>
+          <p:cNvSpPr/>
+          <p:nvPr/>
+        </p:nvSpPr>
+        <p:spPr>
+          <a:xfrm>
+            <a:off x="685800" y="1828800"/>
+            <a:ext cx="2346960" cy="365760"/>
+          </a:xfrm>
+          <a:prstGeom prst="rect">
+            <a:avLst/>
+          </a:prstGeom>
+          <a:noFill/>
+          <a:ln/>
+        </p:spPr>
+        <p:txBody>
+          <a:bodyPr wrap="square" rtlCol="0" anchor="ctr"/>
+          <a:lstStyle/>
+          <a:p>
+            <a:pPr algn="ctr" indent="0" marL="0">
               <a:buNone/>
             </a:pPr>
-            <a:endParaRPr lang="en-US" sz="1500" dirty="0"/>
-          </a:p>
-          <a:p>
-            <a:pPr marL="342900" indent="-342900">
-              <a:buSzPct val="100000"/>
-              <a:buChar char="•"/>
-            </a:pPr>
-            <a:r>
-              <a:rPr lang="en-US" sz="1200" dirty="0">
-                <a:solidFill>
-                  <a:srgbClr val="E2E8F0"/>
+            <a:r>
+              <a:rPr lang="en-US" sz="1300" b="1" dirty="0">
+                <a:solidFill>
+                  <a:srgbClr val="F97316"/>
                 </a:solidFill>
                 <a:latin typeface="Calibri" pitchFamily="34" charset="0"/>
                 <a:ea typeface="Calibri" pitchFamily="34" charset="-122"/>
                 <a:cs typeface="Calibri" pitchFamily="34" charset="-120"/>
               </a:rPr>
-              <a:t>P1 : Arbres binaires — vocabulaire, BST, dessiner au tableau</a:t>
-            </a:r>
-            <a:endParaRPr lang="en-US" sz="1500" dirty="0"/>
-          </a:p>
-          <a:p>
-            <a:pPr marL="342900" indent="-342900">
-              <a:buSzPct val="100000"/>
-              <a:buChar char="•"/>
-            </a:pPr>
-            <a:r>
-              <a:rPr lang="en-US" sz="1200" dirty="0">
-                <a:solidFill>
-                  <a:srgbClr val="E2E8F0"/>
+              <a:t>BST</a:t>
+            </a:r>
+            <a:endParaRPr lang="en-US" sz="1300" dirty="0"/>
+          </a:p>
+        </p:txBody>
+      </p:sp>
+      <p:sp>
+        <p:nvSpPr>
+          <p:cNvPr id="6" name="Text 4"/>
+          <p:cNvSpPr/>
+          <p:nvPr/>
+        </p:nvSpPr>
+        <p:spPr>
+          <a:xfrm>
+            <a:off x="685800" y="2286000"/>
+            <a:ext cx="2346960" cy="1828800"/>
+          </a:xfrm>
+          <a:prstGeom prst="rect">
+            <a:avLst/>
+          </a:prstGeom>
+          <a:noFill/>
+          <a:ln/>
+        </p:spPr>
+        <p:txBody>
+          <a:bodyPr wrap="square" rtlCol="0" anchor="t"/>
+          <a:lstStyle/>
+          <a:p>
+            <a:pPr algn="ctr" indent="0" marL="0">
+              <a:buNone/>
+            </a:pPr>
+            <a:r>
+              <a:rPr lang="en-US" sz="1100" dirty="0">
+                <a:solidFill>
+                  <a:srgbClr val="94A3B8"/>
                 </a:solidFill>
                 <a:latin typeface="Calibri" pitchFamily="34" charset="0"/>
                 <a:ea typeface="Calibri" pitchFamily="34" charset="-122"/>
                 <a:cs typeface="Calibri" pitchFamily="34" charset="-120"/>
               </a:rPr>
-              <a:t>P2 : Les 3 parcours (inorder, preorder, postorder) — tracer à la main</a:t>
-            </a:r>
-            <a:endParaRPr lang="en-US" sz="1500" dirty="0"/>
-          </a:p>
-          <a:p>
-            <a:pPr marL="342900" indent="-342900">
-              <a:buSzPct val="100000"/>
-              <a:buChar char="•"/>
-            </a:pPr>
-            <a:r>
-              <a:rPr lang="en-US" sz="1200" dirty="0">
-                <a:solidFill>
-                  <a:srgbClr val="E2E8F0"/>
+              <a:t>Gauche &lt; Racine &lt; Droite, O(log n)</a:t>
+            </a:r>
+            <a:endParaRPr lang="en-US" sz="1100" dirty="0"/>
+          </a:p>
+        </p:txBody>
+      </p:sp>
+      <p:sp>
+        <p:nvSpPr>
+          <p:cNvPr id="7" name="Shape 5"/>
+          <p:cNvSpPr/>
+          <p:nvPr/>
+        </p:nvSpPr>
+        <p:spPr>
+          <a:xfrm>
+            <a:off x="3352800" y="1097280"/>
+            <a:ext cx="2621280" cy="3200400"/>
+          </a:xfrm>
+          <a:prstGeom prst="roundRect">
+            <a:avLst>
+              <a:gd name="adj" fmla="val 3488"/>
+            </a:avLst>
+          </a:prstGeom>
+          <a:solidFill>
+            <a:srgbClr val="2D1A00"/>
+          </a:solidFill>
+          <a:ln/>
+        </p:spPr>
+      </p:sp>
+      <p:sp>
+        <p:nvSpPr>
+          <p:cNvPr id="8" name="Text 6"/>
+          <p:cNvSpPr/>
+          <p:nvPr/>
+        </p:nvSpPr>
+        <p:spPr>
+          <a:xfrm>
+            <a:off x="3352800" y="1280160"/>
+            <a:ext cx="2621280" cy="457200"/>
+          </a:xfrm>
+          <a:prstGeom prst="rect">
+            <a:avLst/>
+          </a:prstGeom>
+          <a:noFill/>
+          <a:ln/>
+        </p:spPr>
+        <p:txBody>
+          <a:bodyPr wrap="square" rtlCol="0" anchor="ctr"/>
+          <a:lstStyle/>
+          <a:p>
+            <a:pPr algn="ctr" indent="0" marL="0">
+              <a:buNone/>
+            </a:pPr>
+            <a:r>
+              <a:rPr lang="en-US" sz="2800" dirty="0">
+                <a:solidFill>
+                  <a:srgbClr val="000000"/>
+                </a:solidFill>
+              </a:rPr>
+              <a:t>🔄</a:t>
+            </a:r>
+            <a:endParaRPr lang="en-US" sz="2800" dirty="0"/>
+          </a:p>
+        </p:txBody>
+      </p:sp>
+      <p:sp>
+        <p:nvSpPr>
+          <p:cNvPr id="9" name="Text 7"/>
+          <p:cNvSpPr/>
+          <p:nvPr/>
+        </p:nvSpPr>
+        <p:spPr>
+          <a:xfrm>
+            <a:off x="3489960" y="1828800"/>
+            <a:ext cx="2346960" cy="365760"/>
+          </a:xfrm>
+          <a:prstGeom prst="rect">
+            <a:avLst/>
+          </a:prstGeom>
+          <a:noFill/>
+          <a:ln/>
+        </p:spPr>
+        <p:txBody>
+          <a:bodyPr wrap="square" rtlCol="0" anchor="ctr"/>
+          <a:lstStyle/>
+          <a:p>
+            <a:pPr algn="ctr" indent="0" marL="0">
+              <a:buNone/>
+            </a:pPr>
+            <a:r>
+              <a:rPr lang="en-US" sz="1300" b="1" dirty="0">
+                <a:solidFill>
+                  <a:srgbClr val="F97316"/>
                 </a:solidFill>
                 <a:latin typeface="Calibri" pitchFamily="34" charset="0"/>
                 <a:ea typeface="Calibri" pitchFamily="34" charset="-122"/>
                 <a:cs typeface="Calibri" pitchFamily="34" charset="-120"/>
               </a:rPr>
-              <a:t>P3 : Insertion Sort + mini-jeu (tri pas à pas visuel)</a:t>
-            </a:r>
-            <a:endParaRPr lang="en-US" sz="1500" dirty="0"/>
-          </a:p>
-          <a:p>
-            <a:pPr marL="342900" indent="-342900">
-              <a:buSzPct val="100000"/>
-              <a:buChar char="•"/>
-            </a:pPr>
-            <a:r>
-              <a:rPr lang="en-US" sz="1200" dirty="0">
-                <a:solidFill>
-                  <a:srgbClr val="E2E8F0"/>
+              <a:t>Parcours</a:t>
+            </a:r>
+            <a:endParaRPr lang="en-US" sz="1300" dirty="0"/>
+          </a:p>
+        </p:txBody>
+      </p:sp>
+      <p:sp>
+        <p:nvSpPr>
+          <p:cNvPr id="10" name="Text 8"/>
+          <p:cNvSpPr/>
+          <p:nvPr/>
+        </p:nvSpPr>
+        <p:spPr>
+          <a:xfrm>
+            <a:off x="3489960" y="2286000"/>
+            <a:ext cx="2346960" cy="1828800"/>
+          </a:xfrm>
+          <a:prstGeom prst="rect">
+            <a:avLst/>
+          </a:prstGeom>
+          <a:noFill/>
+          <a:ln/>
+        </p:spPr>
+        <p:txBody>
+          <a:bodyPr wrap="square" rtlCol="0" anchor="t"/>
+          <a:lstStyle/>
+          <a:p>
+            <a:pPr algn="ctr" indent="0" marL="0">
+              <a:buNone/>
+            </a:pPr>
+            <a:r>
+              <a:rPr lang="en-US" sz="1100" dirty="0">
+                <a:solidFill>
+                  <a:srgbClr val="94A3B8"/>
                 </a:solidFill>
                 <a:latin typeface="Calibri" pitchFamily="34" charset="0"/>
                 <a:ea typeface="Calibri" pitchFamily="34" charset="-122"/>
                 <a:cs typeface="Calibri" pitchFamily="34" charset="-120"/>
               </a:rPr>
-              <a:t>P4 : Exercice Java — BST + tri sur un contexte concret</a:t>
-            </a:r>
-            <a:endParaRPr lang="en-US" sz="1500" dirty="0"/>
-          </a:p>
-          <a:p>
-            <a:pPr indent="0" marL="0">
+              <a:t>Inorder = trié, Preorder = copie, Postorder = suppression</a:t>
+            </a:r>
+            <a:endParaRPr lang="en-US" sz="1100" dirty="0"/>
+          </a:p>
+        </p:txBody>
+      </p:sp>
+      <p:sp>
+        <p:nvSpPr>
+          <p:cNvPr id="11" name="Shape 9"/>
+          <p:cNvSpPr/>
+          <p:nvPr/>
+        </p:nvSpPr>
+        <p:spPr>
+          <a:xfrm>
+            <a:off x="6156960" y="1097280"/>
+            <a:ext cx="2621280" cy="3200400"/>
+          </a:xfrm>
+          <a:prstGeom prst="roundRect">
+            <a:avLst>
+              <a:gd name="adj" fmla="val 3488"/>
+            </a:avLst>
+          </a:prstGeom>
+          <a:solidFill>
+            <a:srgbClr val="2D1A00"/>
+          </a:solidFill>
+          <a:ln/>
+        </p:spPr>
+      </p:sp>
+      <p:sp>
+        <p:nvSpPr>
+          <p:cNvPr id="12" name="Text 10"/>
+          <p:cNvSpPr/>
+          <p:nvPr/>
+        </p:nvSpPr>
+        <p:spPr>
+          <a:xfrm>
+            <a:off x="6156960" y="1280160"/>
+            <a:ext cx="2621280" cy="457200"/>
+          </a:xfrm>
+          <a:prstGeom prst="rect">
+            <a:avLst/>
+          </a:prstGeom>
+          <a:noFill/>
+          <a:ln/>
+        </p:spPr>
+        <p:txBody>
+          <a:bodyPr wrap="square" rtlCol="0" anchor="ctr"/>
+          <a:lstStyle/>
+          <a:p>
+            <a:pPr algn="ctr" indent="0" marL="0">
               <a:buNone/>
             </a:pPr>
-            <a:endParaRPr lang="en-US" sz="1500" dirty="0"/>
-          </a:p>
-          <a:p>
-            <a:pPr indent="0" marL="0">
+            <a:r>
+              <a:rPr lang="en-US" sz="2800" dirty="0">
+                <a:solidFill>
+                  <a:srgbClr val="000000"/>
+                </a:solidFill>
+              </a:rPr>
+              <a:t>📊</a:t>
+            </a:r>
+            <a:endParaRPr lang="en-US" sz="2800" dirty="0"/>
+          </a:p>
+        </p:txBody>
+      </p:sp>
+      <p:sp>
+        <p:nvSpPr>
+          <p:cNvPr id="13" name="Text 11"/>
+          <p:cNvSpPr/>
+          <p:nvPr/>
+        </p:nvSpPr>
+        <p:spPr>
+          <a:xfrm>
+            <a:off x="6294120" y="1828800"/>
+            <a:ext cx="2346960" cy="365760"/>
+          </a:xfrm>
+          <a:prstGeom prst="rect">
+            <a:avLst/>
+          </a:prstGeom>
+          <a:noFill/>
+          <a:ln/>
+        </p:spPr>
+        <p:txBody>
+          <a:bodyPr wrap="square" rtlCol="0" anchor="ctr"/>
+          <a:lstStyle/>
+          <a:p>
+            <a:pPr algn="ctr" indent="0" marL="0">
               <a:buNone/>
             </a:pPr>
             <a:r>
-              <a:rPr lang="en-US" sz="1400" b="1" dirty="0">
+              <a:rPr lang="en-US" sz="1300" b="1" dirty="0">
                 <a:solidFill>
                   <a:srgbClr val="F97316"/>
                 </a:solidFill>
@@ -3241,81 +2742,48 @@
                 <a:ea typeface="Calibri" pitchFamily="34" charset="-122"/>
                 <a:cs typeface="Calibri" pitchFamily="34" charset="-120"/>
               </a:rPr>
-              <a:t>Critère P4 — l'étudiant doit :</a:t>
-            </a:r>
-            <a:endParaRPr lang="en-US" sz="1500" dirty="0"/>
-          </a:p>
-          <a:p>
-            <a:pPr marL="342900" indent="-342900">
-              <a:buSzPct val="100000"/>
-              <a:buChar char="•"/>
-            </a:pPr>
-            <a:r>
-              <a:rPr lang="en-US" sz="1200" dirty="0">
-                <a:solidFill>
-                  <a:srgbClr val="E2E8F0"/>
+              <a:t>Tri</a:t>
+            </a:r>
+            <a:endParaRPr lang="en-US" sz="1300" dirty="0"/>
+          </a:p>
+        </p:txBody>
+      </p:sp>
+      <p:sp>
+        <p:nvSpPr>
+          <p:cNvPr id="14" name="Text 12"/>
+          <p:cNvSpPr/>
+          <p:nvPr/>
+        </p:nvSpPr>
+        <p:spPr>
+          <a:xfrm>
+            <a:off x="6294120" y="2286000"/>
+            <a:ext cx="2346960" cy="1828800"/>
+          </a:xfrm>
+          <a:prstGeom prst="rect">
+            <a:avLst/>
+          </a:prstGeom>
+          <a:noFill/>
+          <a:ln/>
+        </p:spPr>
+        <p:txBody>
+          <a:bodyPr wrap="square" rtlCol="0" anchor="t"/>
+          <a:lstStyle/>
+          <a:p>
+            <a:pPr algn="ctr" indent="0" marL="0">
+              <a:buNone/>
+            </a:pPr>
+            <a:r>
+              <a:rPr lang="en-US" sz="1100" dirty="0">
+                <a:solidFill>
+                  <a:srgbClr val="94A3B8"/>
                 </a:solidFill>
                 <a:latin typeface="Calibri" pitchFamily="34" charset="0"/>
                 <a:ea typeface="Calibri" pitchFamily="34" charset="-122"/>
                 <a:cs typeface="Calibri" pitchFamily="34" charset="-120"/>
               </a:rPr>
-              <a:t>Implémenter un arbre binaire avec insertion et parcours</a:t>
-            </a:r>
-            <a:endParaRPr lang="en-US" sz="1500" dirty="0"/>
-          </a:p>
-          <a:p>
-            <a:pPr marL="342900" indent="-342900">
-              <a:buSzPct val="100000"/>
-              <a:buChar char="•"/>
-            </a:pPr>
-            <a:r>
-              <a:rPr lang="en-US" sz="1200" dirty="0">
-                <a:solidFill>
-                  <a:srgbClr val="E2E8F0"/>
-                </a:solidFill>
-                <a:latin typeface="Calibri" pitchFamily="34" charset="0"/>
-                <a:ea typeface="Calibri" pitchFamily="34" charset="-122"/>
-                <a:cs typeface="Calibri" pitchFamily="34" charset="-120"/>
-              </a:rPr>
-              <a:t>Implémenter au moins un algorithme de tri en Java</a:t>
-            </a:r>
-            <a:endParaRPr lang="en-US" sz="1500" dirty="0"/>
-          </a:p>
-          <a:p>
-            <a:pPr marL="342900" indent="-342900">
-              <a:buSzPct val="100000"/>
-              <a:buChar char="•"/>
-            </a:pPr>
-            <a:r>
-              <a:rPr lang="en-US" sz="1200" dirty="0">
-                <a:solidFill>
-                  <a:srgbClr val="E2E8F0"/>
-                </a:solidFill>
-                <a:latin typeface="Calibri" pitchFamily="34" charset="0"/>
-                <a:ea typeface="Calibri" pitchFamily="34" charset="-122"/>
-                <a:cs typeface="Calibri" pitchFamily="34" charset="-120"/>
-              </a:rPr>
-              <a:t>Montrer les parcours d'arbre avec un exemple concret</a:t>
-            </a:r>
-            <a:endParaRPr lang="en-US" sz="1500" dirty="0"/>
-          </a:p>
-          <a:p>
-            <a:pPr marL="342900" indent="-342900">
-              <a:buSzPct val="100000"/>
-              <a:buChar char="•"/>
-            </a:pPr>
-            <a:r>
-              <a:rPr lang="en-US" sz="1200" dirty="0">
-                <a:solidFill>
-                  <a:srgbClr val="E2E8F0"/>
-                </a:solidFill>
-                <a:latin typeface="Calibri" pitchFamily="34" charset="0"/>
-                <a:ea typeface="Calibri" pitchFamily="34" charset="-122"/>
-                <a:cs typeface="Calibri" pitchFamily="34" charset="-120"/>
-              </a:rPr>
-              <a:t>Le code doit résoudre un problème (trier des produits, organiser des données)</a:t>
-            </a:r>
-            <a:endParaRPr lang="en-US" sz="1500" dirty="0"/>
+              <a:t>O(n log n) optimal, Quick/Merge en pratique</a:t>
+            </a:r>
+            <a:endParaRPr lang="en-US" sz="1100" dirty="0"/>
           </a:p>
         </p:txBody>
       </p:sp>
